--- a/template.pptx
+++ b/template.pptx
@@ -130,8 +130,7 @@
 <file path=ppt/revisionInfo.xml><?xml version="1.0" encoding="utf-8"?>
 <p1510:revInfo xmlns:a="http://schemas.openxmlformats.org/drawingml/2006/main" xmlns:r="http://schemas.openxmlformats.org/officeDocument/2006/relationships" xmlns:p1510="http://schemas.microsoft.com/office/powerpoint/2015/10/main">
   <p1510:revLst>
-    <p1510:client id="{E05653D0-1951-FF86-5E86-CE48A718C62C}" v="2" dt="2024-05-14T14:20:05.019"/>
-    <p1510:client id="{F7BFCCB5-6F60-4B4C-8F2B-82E3B95F8D19}" v="4" dt="2024-05-14T16:11:44.278"/>
+    <p1510:client id="{F7BFCCB5-6F60-4B4C-8F2B-82E3B95F8D19}" v="28" dt="2024-05-20T10:26:12.010"/>
   </p1510:revLst>
 </p1510:revInfo>
 </file>
@@ -141,7 +140,7 @@
   <pc:docChgLst>
     <pc:chgData name="Andrew Hood (Strategy Unit, hosted by ML)" userId="8780178f-c962-4518-a070-fd8292572a75" providerId="ADAL" clId="{F7BFCCB5-6F60-4B4C-8F2B-82E3B95F8D19}"/>
     <pc:docChg chg="undo custSel modSld delMainMaster modMainMaster">
-      <pc:chgData name="Andrew Hood (Strategy Unit, hosted by ML)" userId="8780178f-c962-4518-a070-fd8292572a75" providerId="ADAL" clId="{F7BFCCB5-6F60-4B4C-8F2B-82E3B95F8D19}" dt="2024-05-14T16:11:52.845" v="88" actId="242"/>
+      <pc:chgData name="Andrew Hood (Strategy Unit, hosted by ML)" userId="8780178f-c962-4518-a070-fd8292572a75" providerId="ADAL" clId="{F7BFCCB5-6F60-4B4C-8F2B-82E3B95F8D19}" dt="2024-05-20T10:26:12.880" v="158" actId="478"/>
       <pc:docMkLst>
         <pc:docMk/>
       </pc:docMkLst>
@@ -350,13 +349,13 @@
         </pc:spChg>
       </pc:sldChg>
       <pc:sldChg chg="addSp modSp mod modClrScheme chgLayout">
-        <pc:chgData name="Andrew Hood (Strategy Unit, hosted by ML)" userId="8780178f-c962-4518-a070-fd8292572a75" providerId="ADAL" clId="{F7BFCCB5-6F60-4B4C-8F2B-82E3B95F8D19}" dt="2024-05-14T16:01:06.885" v="80" actId="700"/>
+        <pc:chgData name="Andrew Hood (Strategy Unit, hosted by ML)" userId="8780178f-c962-4518-a070-fd8292572a75" providerId="ADAL" clId="{F7BFCCB5-6F60-4B4C-8F2B-82E3B95F8D19}" dt="2024-05-20T10:12:24.094" v="128" actId="27636"/>
         <pc:sldMkLst>
           <pc:docMk/>
           <pc:sldMk cId="3429203284" sldId="2147479339"/>
         </pc:sldMkLst>
         <pc:spChg chg="mod ord">
-          <ac:chgData name="Andrew Hood (Strategy Unit, hosted by ML)" userId="8780178f-c962-4518-a070-fd8292572a75" providerId="ADAL" clId="{F7BFCCB5-6F60-4B4C-8F2B-82E3B95F8D19}" dt="2024-05-14T16:01:06.885" v="80" actId="700"/>
+          <ac:chgData name="Andrew Hood (Strategy Unit, hosted by ML)" userId="8780178f-c962-4518-a070-fd8292572a75" providerId="ADAL" clId="{F7BFCCB5-6F60-4B4C-8F2B-82E3B95F8D19}" dt="2024-05-20T10:12:24.094" v="128" actId="27636"/>
           <ac:spMkLst>
             <pc:docMk/>
             <pc:sldMk cId="3429203284" sldId="2147479339"/>
@@ -426,35 +425,60 @@
           </ac:spMkLst>
         </pc:spChg>
       </pc:sldChg>
-      <pc:sldMasterChg chg="modSp delSldLayout modSldLayout sldLayoutOrd">
-        <pc:chgData name="Andrew Hood (Strategy Unit, hosted by ML)" userId="8780178f-c962-4518-a070-fd8292572a75" providerId="ADAL" clId="{F7BFCCB5-6F60-4B4C-8F2B-82E3B95F8D19}" dt="2024-05-14T16:11:52.845" v="88" actId="242"/>
+      <pc:sldMasterChg chg="addSp delSp modSp mod delSldLayout modSldLayout sldLayoutOrd">
+        <pc:chgData name="Andrew Hood (Strategy Unit, hosted by ML)" userId="8780178f-c962-4518-a070-fd8292572a75" providerId="ADAL" clId="{F7BFCCB5-6F60-4B4C-8F2B-82E3B95F8D19}" dt="2024-05-20T10:26:12.880" v="158" actId="478"/>
         <pc:sldMasterMkLst>
           <pc:docMk/>
           <pc:sldMasterMk cId="1350655971" sldId="2147483660"/>
         </pc:sldMasterMkLst>
         <pc:spChg chg="mod">
-          <ac:chgData name="Andrew Hood (Strategy Unit, hosted by ML)" userId="8780178f-c962-4518-a070-fd8292572a75" providerId="ADAL" clId="{F7BFCCB5-6F60-4B4C-8F2B-82E3B95F8D19}" dt="2024-05-14T16:10:47.332" v="84" actId="2711"/>
+          <ac:chgData name="Andrew Hood (Strategy Unit, hosted by ML)" userId="8780178f-c962-4518-a070-fd8292572a75" providerId="ADAL" clId="{F7BFCCB5-6F60-4B4C-8F2B-82E3B95F8D19}" dt="2024-05-20T10:14:26.550" v="138" actId="14100"/>
           <ac:spMkLst>
             <pc:docMk/>
             <pc:sldMasterMk cId="1350655971" sldId="2147483660"/>
             <ac:spMk id="2" creationId="{00000000-0000-0000-0000-000000000000}"/>
           </ac:spMkLst>
         </pc:spChg>
-        <pc:spChg chg="mod">
-          <ac:chgData name="Andrew Hood (Strategy Unit, hosted by ML)" userId="8780178f-c962-4518-a070-fd8292572a75" providerId="ADAL" clId="{F7BFCCB5-6F60-4B4C-8F2B-82E3B95F8D19}" dt="2024-05-14T16:10:56.732" v="85" actId="2711"/>
+        <pc:spChg chg="add del mod">
+          <ac:chgData name="Andrew Hood (Strategy Unit, hosted by ML)" userId="8780178f-c962-4518-a070-fd8292572a75" providerId="ADAL" clId="{F7BFCCB5-6F60-4B4C-8F2B-82E3B95F8D19}" dt="2024-05-20T10:26:12.880" v="158" actId="478"/>
           <ac:spMkLst>
             <pc:docMk/>
             <pc:sldMasterMk cId="1350655971" sldId="2147483660"/>
             <ac:spMk id="3" creationId="{00000000-0000-0000-0000-000000000000}"/>
           </ac:spMkLst>
         </pc:spChg>
+        <pc:spChg chg="add mod ord">
+          <ac:chgData name="Andrew Hood (Strategy Unit, hosted by ML)" userId="8780178f-c962-4518-a070-fd8292572a75" providerId="ADAL" clId="{F7BFCCB5-6F60-4B4C-8F2B-82E3B95F8D19}" dt="2024-05-20T10:25:53.062" v="152" actId="167"/>
+          <ac:spMkLst>
+            <pc:docMk/>
+            <pc:sldMasterMk cId="1350655971" sldId="2147483660"/>
+            <ac:spMk id="4" creationId="{456AE61C-CB53-A51B-2E3D-419A782B4757}"/>
+          </ac:spMkLst>
+        </pc:spChg>
+        <pc:spChg chg="add del mod">
+          <ac:chgData name="Andrew Hood (Strategy Unit, hosted by ML)" userId="8780178f-c962-4518-a070-fd8292572a75" providerId="ADAL" clId="{F7BFCCB5-6F60-4B4C-8F2B-82E3B95F8D19}" dt="2024-05-20T10:26:12.010" v="157"/>
+          <ac:spMkLst>
+            <pc:docMk/>
+            <pc:sldMasterMk cId="1350655971" sldId="2147483660"/>
+            <ac:spMk id="9" creationId="{5C7D122A-7110-AABB-908A-010492B5E081}"/>
+          </ac:spMkLst>
+        </pc:spChg>
         <pc:sldLayoutChg chg="modSp mod">
-          <pc:chgData name="Andrew Hood (Strategy Unit, hosted by ML)" userId="8780178f-c962-4518-a070-fd8292572a75" providerId="ADAL" clId="{F7BFCCB5-6F60-4B4C-8F2B-82E3B95F8D19}" dt="2024-05-14T16:10:28.016" v="83" actId="6549"/>
+          <pc:chgData name="Andrew Hood (Strategy Unit, hosted by ML)" userId="8780178f-c962-4518-a070-fd8292572a75" providerId="ADAL" clId="{F7BFCCB5-6F60-4B4C-8F2B-82E3B95F8D19}" dt="2024-05-20T10:10:25.926" v="112" actId="404"/>
           <pc:sldLayoutMkLst>
             <pc:docMk/>
             <pc:sldMasterMk cId="1350655971" sldId="2147483660"/>
             <pc:sldLayoutMk cId="2708386492" sldId="2147483661"/>
           </pc:sldLayoutMkLst>
+          <pc:spChg chg="mod">
+            <ac:chgData name="Andrew Hood (Strategy Unit, hosted by ML)" userId="8780178f-c962-4518-a070-fd8292572a75" providerId="ADAL" clId="{F7BFCCB5-6F60-4B4C-8F2B-82E3B95F8D19}" dt="2024-05-20T10:10:25.926" v="112" actId="404"/>
+            <ac:spMkLst>
+              <pc:docMk/>
+              <pc:sldMasterMk cId="1350655971" sldId="2147483660"/>
+              <pc:sldLayoutMk cId="2708386492" sldId="2147483661"/>
+              <ac:spMk id="2" creationId="{00000000-0000-0000-0000-000000000000}"/>
+            </ac:spMkLst>
+          </pc:spChg>
           <pc:spChg chg="mod">
             <ac:chgData name="Andrew Hood (Strategy Unit, hosted by ML)" userId="8780178f-c962-4518-a070-fd8292572a75" providerId="ADAL" clId="{F7BFCCB5-6F60-4B4C-8F2B-82E3B95F8D19}" dt="2024-05-14T16:10:28.016" v="83" actId="6549"/>
             <ac:spMkLst>
@@ -466,12 +490,30 @@
           </pc:spChg>
         </pc:sldLayoutChg>
         <pc:sldLayoutChg chg="addSp modSp mod">
-          <pc:chgData name="Andrew Hood (Strategy Unit, hosted by ML)" userId="8780178f-c962-4518-a070-fd8292572a75" providerId="ADAL" clId="{F7BFCCB5-6F60-4B4C-8F2B-82E3B95F8D19}" dt="2024-05-14T16:00:21.854" v="78" actId="6014"/>
+          <pc:chgData name="Andrew Hood (Strategy Unit, hosted by ML)" userId="8780178f-c962-4518-a070-fd8292572a75" providerId="ADAL" clId="{F7BFCCB5-6F60-4B4C-8F2B-82E3B95F8D19}" dt="2024-05-20T10:12:33.805" v="132" actId="14100"/>
           <pc:sldLayoutMkLst>
             <pc:docMk/>
             <pc:sldMasterMk cId="1350655971" sldId="2147483660"/>
             <pc:sldLayoutMk cId="2468326065" sldId="2147483662"/>
           </pc:sldLayoutMkLst>
+          <pc:spChg chg="mod">
+            <ac:chgData name="Andrew Hood (Strategy Unit, hosted by ML)" userId="8780178f-c962-4518-a070-fd8292572a75" providerId="ADAL" clId="{F7BFCCB5-6F60-4B4C-8F2B-82E3B95F8D19}" dt="2024-05-20T10:12:28.159" v="131" actId="404"/>
+            <ac:spMkLst>
+              <pc:docMk/>
+              <pc:sldMasterMk cId="1350655971" sldId="2147483660"/>
+              <pc:sldLayoutMk cId="2468326065" sldId="2147483662"/>
+              <ac:spMk id="2" creationId="{00000000-0000-0000-0000-000000000000}"/>
+            </ac:spMkLst>
+          </pc:spChg>
+          <pc:spChg chg="mod">
+            <ac:chgData name="Andrew Hood (Strategy Unit, hosted by ML)" userId="8780178f-c962-4518-a070-fd8292572a75" providerId="ADAL" clId="{F7BFCCB5-6F60-4B4C-8F2B-82E3B95F8D19}" dt="2024-05-20T10:12:33.805" v="132" actId="14100"/>
+            <ac:spMkLst>
+              <pc:docMk/>
+              <pc:sldMasterMk cId="1350655971" sldId="2147483660"/>
+              <pc:sldLayoutMk cId="2468326065" sldId="2147483662"/>
+              <ac:spMk id="3" creationId="{00000000-0000-0000-0000-000000000000}"/>
+            </ac:spMkLst>
+          </pc:spChg>
           <pc:spChg chg="ord">
             <ac:chgData name="Andrew Hood (Strategy Unit, hosted by ML)" userId="8780178f-c962-4518-a070-fd8292572a75" providerId="ADAL" clId="{F7BFCCB5-6F60-4B4C-8F2B-82E3B95F8D19}" dt="2024-05-14T15:45:29.818" v="35" actId="166"/>
             <ac:spMkLst>
@@ -491,13 +533,85 @@
             </ac:picMkLst>
           </pc:picChg>
         </pc:sldLayoutChg>
-        <pc:sldLayoutChg chg="mod ord">
-          <pc:chgData name="Andrew Hood (Strategy Unit, hosted by ML)" userId="8780178f-c962-4518-a070-fd8292572a75" providerId="ADAL" clId="{F7BFCCB5-6F60-4B4C-8F2B-82E3B95F8D19}" dt="2024-05-14T15:55:04.746" v="67" actId="20578"/>
+        <pc:sldLayoutChg chg="addSp delSp modSp mod ord">
+          <pc:chgData name="Andrew Hood (Strategy Unit, hosted by ML)" userId="8780178f-c962-4518-a070-fd8292572a75" providerId="ADAL" clId="{F7BFCCB5-6F60-4B4C-8F2B-82E3B95F8D19}" dt="2024-05-20T10:25:38.768" v="149" actId="1076"/>
           <pc:sldLayoutMkLst>
             <pc:docMk/>
             <pc:sldMasterMk cId="1350655971" sldId="2147483660"/>
             <pc:sldLayoutMk cId="2385444012" sldId="2147483664"/>
           </pc:sldLayoutMkLst>
+          <pc:spChg chg="mod">
+            <ac:chgData name="Andrew Hood (Strategy Unit, hosted by ML)" userId="8780178f-c962-4518-a070-fd8292572a75" providerId="ADAL" clId="{F7BFCCB5-6F60-4B4C-8F2B-82E3B95F8D19}" dt="2024-05-20T10:11:22.853" v="116" actId="1076"/>
+            <ac:spMkLst>
+              <pc:docMk/>
+              <pc:sldMasterMk cId="1350655971" sldId="2147483660"/>
+              <pc:sldLayoutMk cId="2385444012" sldId="2147483664"/>
+              <ac:spMk id="2" creationId="{00000000-0000-0000-0000-000000000000}"/>
+            </ac:spMkLst>
+          </pc:spChg>
+          <pc:spChg chg="add del">
+            <ac:chgData name="Andrew Hood (Strategy Unit, hosted by ML)" userId="8780178f-c962-4518-a070-fd8292572a75" providerId="ADAL" clId="{F7BFCCB5-6F60-4B4C-8F2B-82E3B95F8D19}" dt="2024-05-20T10:08:08.565" v="91" actId="478"/>
+            <ac:spMkLst>
+              <pc:docMk/>
+              <pc:sldMasterMk cId="1350655971" sldId="2147483660"/>
+              <pc:sldLayoutMk cId="2385444012" sldId="2147483664"/>
+              <ac:spMk id="3" creationId="{00000000-0000-0000-0000-000000000000}"/>
+            </ac:spMkLst>
+          </pc:spChg>
+          <pc:spChg chg="add mod">
+            <ac:chgData name="Andrew Hood (Strategy Unit, hosted by ML)" userId="8780178f-c962-4518-a070-fd8292572a75" providerId="ADAL" clId="{F7BFCCB5-6F60-4B4C-8F2B-82E3B95F8D19}" dt="2024-05-20T10:25:29.592" v="146" actId="14100"/>
+            <ac:spMkLst>
+              <pc:docMk/>
+              <pc:sldMasterMk cId="1350655971" sldId="2147483660"/>
+              <pc:sldLayoutMk cId="2385444012" sldId="2147483664"/>
+              <ac:spMk id="3" creationId="{D2592819-5C80-B996-F823-F8B9F9EAD6C9}"/>
+            </ac:spMkLst>
+          </pc:spChg>
+          <pc:spChg chg="del">
+            <ac:chgData name="Andrew Hood (Strategy Unit, hosted by ML)" userId="8780178f-c962-4518-a070-fd8292572a75" providerId="ADAL" clId="{F7BFCCB5-6F60-4B4C-8F2B-82E3B95F8D19}" dt="2024-05-20T10:08:21.069" v="93" actId="478"/>
+            <ac:spMkLst>
+              <pc:docMk/>
+              <pc:sldMasterMk cId="1350655971" sldId="2147483660"/>
+              <pc:sldLayoutMk cId="2385444012" sldId="2147483664"/>
+              <ac:spMk id="4" creationId="{00000000-0000-0000-0000-000000000000}"/>
+            </ac:spMkLst>
+          </pc:spChg>
+          <pc:spChg chg="add mod">
+            <ac:chgData name="Andrew Hood (Strategy Unit, hosted by ML)" userId="8780178f-c962-4518-a070-fd8292572a75" providerId="ADAL" clId="{F7BFCCB5-6F60-4B4C-8F2B-82E3B95F8D19}" dt="2024-05-20T10:25:38.768" v="149" actId="1076"/>
+            <ac:spMkLst>
+              <pc:docMk/>
+              <pc:sldMasterMk cId="1350655971" sldId="2147483660"/>
+              <pc:sldLayoutMk cId="2385444012" sldId="2147483664"/>
+              <ac:spMk id="4" creationId="{D1BAB7DA-EC53-0103-E362-83F86BDB6BC4}"/>
+            </ac:spMkLst>
+          </pc:spChg>
+          <pc:spChg chg="add del">
+            <ac:chgData name="Andrew Hood (Strategy Unit, hosted by ML)" userId="8780178f-c962-4518-a070-fd8292572a75" providerId="ADAL" clId="{F7BFCCB5-6F60-4B4C-8F2B-82E3B95F8D19}" dt="2024-05-20T10:08:15.714" v="92" actId="11529"/>
+            <ac:spMkLst>
+              <pc:docMk/>
+              <pc:sldMasterMk cId="1350655971" sldId="2147483660"/>
+              <pc:sldLayoutMk cId="2385444012" sldId="2147483664"/>
+              <ac:spMk id="6" creationId="{12E0DCBC-487B-6D9B-0E87-EA53DA4FB31E}"/>
+            </ac:spMkLst>
+          </pc:spChg>
+          <pc:spChg chg="add del mod">
+            <ac:chgData name="Andrew Hood (Strategy Unit, hosted by ML)" userId="8780178f-c962-4518-a070-fd8292572a75" providerId="ADAL" clId="{F7BFCCB5-6F60-4B4C-8F2B-82E3B95F8D19}" dt="2024-05-20T10:25:25.758" v="144" actId="478"/>
+            <ac:spMkLst>
+              <pc:docMk/>
+              <pc:sldMasterMk cId="1350655971" sldId="2147483660"/>
+              <pc:sldLayoutMk cId="2385444012" sldId="2147483664"/>
+              <ac:spMk id="7" creationId="{F15AAEF2-D340-A43C-719F-622DB49FDAE6}"/>
+            </ac:spMkLst>
+          </pc:spChg>
+          <pc:spChg chg="add del mod">
+            <ac:chgData name="Andrew Hood (Strategy Unit, hosted by ML)" userId="8780178f-c962-4518-a070-fd8292572a75" providerId="ADAL" clId="{F7BFCCB5-6F60-4B4C-8F2B-82E3B95F8D19}" dt="2024-05-20T10:25:32.367" v="147" actId="478"/>
+            <ac:spMkLst>
+              <pc:docMk/>
+              <pc:sldMasterMk cId="1350655971" sldId="2147483660"/>
+              <pc:sldLayoutMk cId="2385444012" sldId="2147483664"/>
+              <ac:spMk id="8" creationId="{AAA6536F-4C7C-B12D-99EE-CF70C041B7B8}"/>
+            </ac:spMkLst>
+          </pc:spChg>
         </pc:sldLayoutChg>
         <pc:sldLayoutChg chg="del mod ord">
           <pc:chgData name="Andrew Hood (Strategy Unit, hosted by ML)" userId="8780178f-c962-4518-a070-fd8292572a75" providerId="ADAL" clId="{F7BFCCB5-6F60-4B4C-8F2B-82E3B95F8D19}" dt="2024-05-14T15:52:22.861" v="58" actId="2696"/>
@@ -515,13 +629,58 @@
             <pc:sldLayoutMk cId="333516022" sldId="2147483666"/>
           </pc:sldLayoutMkLst>
         </pc:sldLayoutChg>
-        <pc:sldLayoutChg chg="mod ord">
-          <pc:chgData name="Andrew Hood (Strategy Unit, hosted by ML)" userId="8780178f-c962-4518-a070-fd8292572a75" providerId="ADAL" clId="{F7BFCCB5-6F60-4B4C-8F2B-82E3B95F8D19}" dt="2024-05-14T15:55:16.700" v="69" actId="20578"/>
+        <pc:sldLayoutChg chg="addSp delSp modSp mod ord">
+          <pc:chgData name="Andrew Hood (Strategy Unit, hosted by ML)" userId="8780178f-c962-4518-a070-fd8292572a75" providerId="ADAL" clId="{F7BFCCB5-6F60-4B4C-8F2B-82E3B95F8D19}" dt="2024-05-20T10:25:16.535" v="143" actId="14100"/>
           <pc:sldLayoutMkLst>
             <pc:docMk/>
             <pc:sldMasterMk cId="1350655971" sldId="2147483660"/>
             <pc:sldLayoutMk cId="2161346945" sldId="2147483668"/>
           </pc:sldLayoutMkLst>
+          <pc:spChg chg="add del mod">
+            <ac:chgData name="Andrew Hood (Strategy Unit, hosted by ML)" userId="8780178f-c962-4518-a070-fd8292572a75" providerId="ADAL" clId="{F7BFCCB5-6F60-4B4C-8F2B-82E3B95F8D19}" dt="2024-05-20T10:25:07.991" v="140" actId="478"/>
+            <ac:spMkLst>
+              <pc:docMk/>
+              <pc:sldMasterMk cId="1350655971" sldId="2147483660"/>
+              <pc:sldLayoutMk cId="2161346945" sldId="2147483668"/>
+              <ac:spMk id="2" creationId="{BE51CA1B-C72C-B407-A809-97CBD1E2CAEA}"/>
+            </ac:spMkLst>
+          </pc:spChg>
+          <pc:spChg chg="mod">
+            <ac:chgData name="Andrew Hood (Strategy Unit, hosted by ML)" userId="8780178f-c962-4518-a070-fd8292572a75" providerId="ADAL" clId="{F7BFCCB5-6F60-4B4C-8F2B-82E3B95F8D19}" dt="2024-05-20T10:09:26.390" v="105" actId="14100"/>
+            <ac:spMkLst>
+              <pc:docMk/>
+              <pc:sldMasterMk cId="1350655971" sldId="2147483660"/>
+              <pc:sldLayoutMk cId="2161346945" sldId="2147483668"/>
+              <ac:spMk id="3" creationId="{00000000-0000-0000-0000-000000000000}"/>
+            </ac:spMkLst>
+          </pc:spChg>
+          <pc:spChg chg="del mod">
+            <ac:chgData name="Andrew Hood (Strategy Unit, hosted by ML)" userId="8780178f-c962-4518-a070-fd8292572a75" providerId="ADAL" clId="{F7BFCCB5-6F60-4B4C-8F2B-82E3B95F8D19}" dt="2024-05-20T10:09:45.404" v="106" actId="478"/>
+            <ac:spMkLst>
+              <pc:docMk/>
+              <pc:sldMasterMk cId="1350655971" sldId="2147483660"/>
+              <pc:sldLayoutMk cId="2161346945" sldId="2147483668"/>
+              <ac:spMk id="4" creationId="{00000000-0000-0000-0000-000000000000}"/>
+            </ac:spMkLst>
+          </pc:spChg>
+          <pc:spChg chg="add mod">
+            <ac:chgData name="Andrew Hood (Strategy Unit, hosted by ML)" userId="8780178f-c962-4518-a070-fd8292572a75" providerId="ADAL" clId="{F7BFCCB5-6F60-4B4C-8F2B-82E3B95F8D19}" dt="2024-05-20T10:25:16.535" v="143" actId="14100"/>
+            <ac:spMkLst>
+              <pc:docMk/>
+              <pc:sldMasterMk cId="1350655971" sldId="2147483660"/>
+              <pc:sldLayoutMk cId="2161346945" sldId="2147483668"/>
+              <ac:spMk id="4" creationId="{DF61A5FC-3684-1BAC-1114-63C491ABAD76}"/>
+            </ac:spMkLst>
+          </pc:spChg>
+          <pc:spChg chg="mod">
+            <ac:chgData name="Andrew Hood (Strategy Unit, hosted by ML)" userId="8780178f-c962-4518-a070-fd8292572a75" providerId="ADAL" clId="{F7BFCCB5-6F60-4B4C-8F2B-82E3B95F8D19}" dt="2024-05-20T10:09:16.558" v="104" actId="404"/>
+            <ac:spMkLst>
+              <pc:docMk/>
+              <pc:sldMasterMk cId="1350655971" sldId="2147483660"/>
+              <pc:sldLayoutMk cId="2161346945" sldId="2147483668"/>
+              <ac:spMk id="9" creationId="{576BF1A0-1B30-B080-929D-2D4F0124B1B7}"/>
+            </ac:spMkLst>
+          </pc:spChg>
         </pc:sldLayoutChg>
         <pc:sldLayoutChg chg="del mod ord">
           <pc:chgData name="Andrew Hood (Strategy Unit, hosted by ML)" userId="8780178f-c962-4518-a070-fd8292572a75" providerId="ADAL" clId="{F7BFCCB5-6F60-4B4C-8F2B-82E3B95F8D19}" dt="2024-05-14T15:51:51.031" v="56" actId="2696"/>
@@ -539,23 +698,41 @@
             <pc:sldLayoutMk cId="3129794799" sldId="2147483671"/>
           </pc:sldLayoutMkLst>
         </pc:sldLayoutChg>
-        <pc:sldLayoutChg chg="mod ord">
-          <pc:chgData name="Andrew Hood (Strategy Unit, hosted by ML)" userId="8780178f-c962-4518-a070-fd8292572a75" providerId="ADAL" clId="{F7BFCCB5-6F60-4B4C-8F2B-82E3B95F8D19}" dt="2024-05-14T15:51:40.708" v="55" actId="6014"/>
+        <pc:sldLayoutChg chg="modSp mod ord">
+          <pc:chgData name="Andrew Hood (Strategy Unit, hosted by ML)" userId="8780178f-c962-4518-a070-fd8292572a75" providerId="ADAL" clId="{F7BFCCB5-6F60-4B4C-8F2B-82E3B95F8D19}" dt="2024-05-20T10:10:49.630" v="114" actId="404"/>
           <pc:sldLayoutMkLst>
             <pc:docMk/>
             <pc:sldMasterMk cId="1350655971" sldId="2147483660"/>
             <pc:sldLayoutMk cId="2868002840" sldId="2147483672"/>
           </pc:sldLayoutMkLst>
+          <pc:spChg chg="mod">
+            <ac:chgData name="Andrew Hood (Strategy Unit, hosted by ML)" userId="8780178f-c962-4518-a070-fd8292572a75" providerId="ADAL" clId="{F7BFCCB5-6F60-4B4C-8F2B-82E3B95F8D19}" dt="2024-05-20T10:10:49.630" v="114" actId="404"/>
+            <ac:spMkLst>
+              <pc:docMk/>
+              <pc:sldMasterMk cId="1350655971" sldId="2147483660"/>
+              <pc:sldLayoutMk cId="2868002840" sldId="2147483672"/>
+              <ac:spMk id="2" creationId="{00000000-0000-0000-0000-000000000000}"/>
+            </ac:spMkLst>
+          </pc:spChg>
         </pc:sldLayoutChg>
-        <pc:sldLayoutChg chg="modSp mod ord">
-          <pc:chgData name="Andrew Hood (Strategy Unit, hosted by ML)" userId="8780178f-c962-4518-a070-fd8292572a75" providerId="ADAL" clId="{F7BFCCB5-6F60-4B4C-8F2B-82E3B95F8D19}" dt="2024-05-14T16:11:52.845" v="88" actId="242"/>
+        <pc:sldLayoutChg chg="addSp delSp modSp mod ord">
+          <pc:chgData name="Andrew Hood (Strategy Unit, hosted by ML)" userId="8780178f-c962-4518-a070-fd8292572a75" providerId="ADAL" clId="{F7BFCCB5-6F60-4B4C-8F2B-82E3B95F8D19}" dt="2024-05-20T10:13:11.815" v="134" actId="11529"/>
           <pc:sldLayoutMkLst>
             <pc:docMk/>
             <pc:sldMasterMk cId="1350655971" sldId="2147483660"/>
             <pc:sldLayoutMk cId="2240479861" sldId="2147483673"/>
           </pc:sldLayoutMkLst>
           <pc:spChg chg="mod">
-            <ac:chgData name="Andrew Hood (Strategy Unit, hosted by ML)" userId="8780178f-c962-4518-a070-fd8292572a75" providerId="ADAL" clId="{F7BFCCB5-6F60-4B4C-8F2B-82E3B95F8D19}" dt="2024-05-14T16:11:52.845" v="88" actId="242"/>
+            <ac:chgData name="Andrew Hood (Strategy Unit, hosted by ML)" userId="8780178f-c962-4518-a070-fd8292572a75" providerId="ADAL" clId="{F7BFCCB5-6F60-4B4C-8F2B-82E3B95F8D19}" dt="2024-05-20T10:11:53.591" v="122" actId="404"/>
+            <ac:spMkLst>
+              <pc:docMk/>
+              <pc:sldMasterMk cId="1350655971" sldId="2147483660"/>
+              <pc:sldLayoutMk cId="2240479861" sldId="2147483673"/>
+              <ac:spMk id="2" creationId="{00000000-0000-0000-0000-000000000000}"/>
+            </ac:spMkLst>
+          </pc:spChg>
+          <pc:spChg chg="mod">
+            <ac:chgData name="Andrew Hood (Strategy Unit, hosted by ML)" userId="8780178f-c962-4518-a070-fd8292572a75" providerId="ADAL" clId="{F7BFCCB5-6F60-4B4C-8F2B-82E3B95F8D19}" dt="2024-05-20T10:11:59.853" v="124" actId="14100"/>
             <ac:spMkLst>
               <pc:docMk/>
               <pc:sldMasterMk cId="1350655971" sldId="2147483660"/>
@@ -563,13 +740,31 @@
               <ac:spMk id="3" creationId="{00000000-0000-0000-0000-000000000000}"/>
             </ac:spMkLst>
           </pc:spChg>
-          <pc:spChg chg="mod">
-            <ac:chgData name="Andrew Hood (Strategy Unit, hosted by ML)" userId="8780178f-c962-4518-a070-fd8292572a75" providerId="ADAL" clId="{F7BFCCB5-6F60-4B4C-8F2B-82E3B95F8D19}" dt="2024-05-14T15:59:49.118" v="77" actId="14100"/>
+          <pc:spChg chg="del mod">
+            <ac:chgData name="Andrew Hood (Strategy Unit, hosted by ML)" userId="8780178f-c962-4518-a070-fd8292572a75" providerId="ADAL" clId="{F7BFCCB5-6F60-4B4C-8F2B-82E3B95F8D19}" dt="2024-05-20T10:12:57.870" v="133" actId="478"/>
             <ac:spMkLst>
               <pc:docMk/>
               <pc:sldMasterMk cId="1350655971" sldId="2147483660"/>
               <pc:sldLayoutMk cId="2240479861" sldId="2147483673"/>
               <ac:spMk id="4" creationId="{3624C560-4E3C-7F23-9A71-5ECD5129CBDE}"/>
+            </ac:spMkLst>
+          </pc:spChg>
+          <pc:spChg chg="add del">
+            <ac:chgData name="Andrew Hood (Strategy Unit, hosted by ML)" userId="8780178f-c962-4518-a070-fd8292572a75" providerId="ADAL" clId="{F7BFCCB5-6F60-4B4C-8F2B-82E3B95F8D19}" dt="2024-05-20T10:13:11.815" v="134" actId="11529"/>
+            <ac:spMkLst>
+              <pc:docMk/>
+              <pc:sldMasterMk cId="1350655971" sldId="2147483660"/>
+              <pc:sldLayoutMk cId="2240479861" sldId="2147483673"/>
+              <ac:spMk id="7" creationId="{2E59ECB5-E363-EC6A-2228-AC3CE60F8940}"/>
+            </ac:spMkLst>
+          </pc:spChg>
+          <pc:spChg chg="add mod">
+            <ac:chgData name="Andrew Hood (Strategy Unit, hosted by ML)" userId="8780178f-c962-4518-a070-fd8292572a75" providerId="ADAL" clId="{F7BFCCB5-6F60-4B4C-8F2B-82E3B95F8D19}" dt="2024-05-20T10:13:11.815" v="134" actId="11529"/>
+            <ac:spMkLst>
+              <pc:docMk/>
+              <pc:sldMasterMk cId="1350655971" sldId="2147483660"/>
+              <pc:sldLayoutMk cId="2240479861" sldId="2147483673"/>
+              <ac:spMk id="8" creationId="{E661F691-68A2-ACF8-5D27-3F5571B6FD79}"/>
             </ac:spMkLst>
           </pc:spChg>
         </pc:sldLayoutChg>
@@ -764,7 +959,7 @@
           <a:p>
             <a:fld id="{8490CA9A-2E33-CF44-8384-C36560AEBD58}" type="datetimeFigureOut">
               <a:rPr lang="en-US" smtClean="0"/>
-              <a:t>5/14/2024</a:t>
+              <a:t>5/20/2024</a:t>
             </a:fld>
             <a:endParaRPr lang="en-US"/>
           </a:p>
@@ -1700,7 +1895,7 @@
           </a:bodyPr>
           <a:lstStyle>
             <a:lvl1pPr algn="l">
-              <a:defRPr sz="4400" spc="200" baseline="0"/>
+              <a:defRPr sz="3600" spc="200" baseline="0"/>
             </a:lvl1pPr>
           </a:lstStyle>
           <a:p>
@@ -1727,6 +1922,9 @@
             <a:off x="457199" y="6020353"/>
             <a:ext cx="8406374" cy="674129"/>
           </a:xfrm>
+          <a:prstGeom prst="rect">
+            <a:avLst/>
+          </a:prstGeom>
         </p:spPr>
         <p:txBody>
           <a:bodyPr lIns="91440" rIns="91440" anchor="ctr">
@@ -1989,7 +2187,7 @@
           </a:bodyPr>
           <a:lstStyle>
             <a:lvl1pPr algn="l">
-              <a:defRPr sz="4400" spc="200" baseline="0"/>
+              <a:defRPr sz="3600" spc="200" baseline="0"/>
             </a:lvl1pPr>
           </a:lstStyle>
           <a:p>
@@ -2016,6 +2214,9 @@
             <a:off x="457199" y="6020353"/>
             <a:ext cx="7772399" cy="674129"/>
           </a:xfrm>
+          <a:prstGeom prst="rect">
+            <a:avLst/>
+          </a:prstGeom>
         </p:spPr>
         <p:txBody>
           <a:bodyPr lIns="91440" rIns="91440" anchor="ctr">
@@ -2166,7 +2367,7 @@
 </file>
 
 <file path=ppt/slideLayouts/slideLayout3.xml><?xml version="1.0" encoding="utf-8"?>
-<p:sldLayout xmlns:a="http://schemas.openxmlformats.org/drawingml/2006/main" xmlns:r="http://schemas.openxmlformats.org/officeDocument/2006/relationships" xmlns:p="http://schemas.openxmlformats.org/presentationml/2006/main" type="twoObj" preserve="1">
+<p:sldLayout xmlns:a="http://schemas.openxmlformats.org/drawingml/2006/main" xmlns:r="http://schemas.openxmlformats.org/officeDocument/2006/relationships" xmlns:p="http://schemas.openxmlformats.org/presentationml/2006/main" preserve="1" userDrawn="1">
   <p:cSld name="Two Content">
     <p:spTree>
       <p:nvGrpSpPr>
@@ -2194,131 +2395,23 @@
         </p:nvSpPr>
         <p:spPr>
           <a:xfrm>
-            <a:off x="1024127" y="192984"/>
-            <a:ext cx="9720072" cy="1499616"/>
+            <a:off x="919352" y="419100"/>
+            <a:ext cx="9720072" cy="933450"/>
           </a:xfrm>
         </p:spPr>
         <p:txBody>
-          <a:bodyPr/>
-          <a:lstStyle/>
+          <a:bodyPr>
+            <a:normAutofit/>
+          </a:bodyPr>
+          <a:lstStyle>
+            <a:lvl1pPr>
+              <a:defRPr sz="3600"/>
+            </a:lvl1pPr>
+          </a:lstStyle>
           <a:p>
             <a:r>
               <a:rPr lang="en-GB" dirty="0"/>
               <a:t>Click to edit Master title style</a:t>
-            </a:r>
-            <a:endParaRPr lang="en-US" dirty="0"/>
-          </a:p>
-        </p:txBody>
-      </p:sp>
-      <p:sp>
-        <p:nvSpPr>
-          <p:cNvPr id="3" name="Content Placeholder 2"/>
-          <p:cNvSpPr>
-            <a:spLocks noGrp="1"/>
-          </p:cNvSpPr>
-          <p:nvPr>
-            <p:ph sz="half" idx="1"/>
-          </p:nvPr>
-        </p:nvSpPr>
-        <p:spPr>
-          <a:xfrm>
-            <a:off x="1024127" y="1998070"/>
-            <a:ext cx="4754880" cy="3871102"/>
-          </a:xfrm>
-        </p:spPr>
-        <p:txBody>
-          <a:bodyPr/>
-          <a:lstStyle/>
-          <a:p>
-            <a:pPr lvl="0"/>
-            <a:r>
-              <a:rPr lang="en-GB" dirty="0"/>
-              <a:t>Click to edit Master text styles</a:t>
-            </a:r>
-          </a:p>
-          <a:p>
-            <a:pPr lvl="1"/>
-            <a:r>
-              <a:rPr lang="en-GB" dirty="0"/>
-              <a:t>Second level</a:t>
-            </a:r>
-          </a:p>
-          <a:p>
-            <a:pPr lvl="2"/>
-            <a:r>
-              <a:rPr lang="en-GB" dirty="0"/>
-              <a:t>Third level</a:t>
-            </a:r>
-          </a:p>
-          <a:p>
-            <a:pPr lvl="3"/>
-            <a:r>
-              <a:rPr lang="en-GB" dirty="0"/>
-              <a:t>Fourth level</a:t>
-            </a:r>
-          </a:p>
-          <a:p>
-            <a:pPr lvl="4"/>
-            <a:r>
-              <a:rPr lang="en-GB" dirty="0"/>
-              <a:t>Fifth level</a:t>
-            </a:r>
-            <a:endParaRPr lang="en-US" dirty="0"/>
-          </a:p>
-        </p:txBody>
-      </p:sp>
-      <p:sp>
-        <p:nvSpPr>
-          <p:cNvPr id="4" name="Content Placeholder 3"/>
-          <p:cNvSpPr>
-            <a:spLocks noGrp="1"/>
-          </p:cNvSpPr>
-          <p:nvPr>
-            <p:ph sz="half" idx="2"/>
-          </p:nvPr>
-        </p:nvSpPr>
-        <p:spPr>
-          <a:xfrm>
-            <a:off x="5989319" y="1998070"/>
-            <a:ext cx="4754880" cy="3871102"/>
-          </a:xfrm>
-        </p:spPr>
-        <p:txBody>
-          <a:bodyPr/>
-          <a:lstStyle/>
-          <a:p>
-            <a:pPr lvl="0"/>
-            <a:r>
-              <a:rPr lang="en-GB"/>
-              <a:t>Click to edit Master text styles</a:t>
-            </a:r>
-          </a:p>
-          <a:p>
-            <a:pPr lvl="1"/>
-            <a:r>
-              <a:rPr lang="en-GB"/>
-              <a:t>Second level</a:t>
-            </a:r>
-          </a:p>
-          <a:p>
-            <a:pPr lvl="2"/>
-            <a:r>
-              <a:rPr lang="en-GB"/>
-              <a:t>Third level</a:t>
-            </a:r>
-          </a:p>
-          <a:p>
-            <a:pPr lvl="3"/>
-            <a:r>
-              <a:rPr lang="en-GB"/>
-              <a:t>Fourth level</a:t>
-            </a:r>
-          </a:p>
-          <a:p>
-            <a:pPr lvl="4"/>
-            <a:r>
-              <a:rPr lang="en-GB"/>
-              <a:t>Fifth level</a:t>
             </a:r>
             <a:endParaRPr lang="en-US" dirty="0"/>
           </a:p>
@@ -2463,6 +2556,198 @@
           </a:p>
         </p:txBody>
       </p:sp>
+      <p:sp>
+        <p:nvSpPr>
+          <p:cNvPr id="3" name="Content Placeholder 2">
+            <a:extLst>
+              <a:ext uri="{FF2B5EF4-FFF2-40B4-BE49-F238E27FC236}">
+                <a16:creationId xmlns:a16="http://schemas.microsoft.com/office/drawing/2014/main" id="{D2592819-5C80-B996-F823-F8B9F9EAD6C9}"/>
+              </a:ext>
+            </a:extLst>
+          </p:cNvPr>
+          <p:cNvSpPr>
+            <a:spLocks noGrp="1"/>
+          </p:cNvSpPr>
+          <p:nvPr>
+            <p:ph idx="10"/>
+          </p:nvPr>
+        </p:nvSpPr>
+        <p:spPr>
+          <a:xfrm>
+            <a:off x="909829" y="1619249"/>
+            <a:ext cx="5046518" cy="4233439"/>
+          </a:xfrm>
+          <a:prstGeom prst="rect">
+            <a:avLst/>
+          </a:prstGeom>
+        </p:spPr>
+        <p:txBody>
+          <a:bodyPr>
+            <a:normAutofit/>
+          </a:bodyPr>
+          <a:lstStyle>
+            <a:lvl1pPr>
+              <a:defRPr sz="1800"/>
+            </a:lvl1pPr>
+            <a:lvl2pPr>
+              <a:defRPr sz="1800"/>
+            </a:lvl2pPr>
+            <a:lvl3pPr>
+              <a:defRPr sz="1800"/>
+            </a:lvl3pPr>
+            <a:lvl4pPr>
+              <a:defRPr sz="1800"/>
+            </a:lvl4pPr>
+            <a:lvl5pPr>
+              <a:defRPr sz="1800"/>
+            </a:lvl5pPr>
+            <a:lvl6pPr>
+              <a:defRPr sz="1600"/>
+            </a:lvl6pPr>
+            <a:lvl7pPr>
+              <a:defRPr sz="1600"/>
+            </a:lvl7pPr>
+            <a:lvl8pPr>
+              <a:defRPr sz="1600"/>
+            </a:lvl8pPr>
+            <a:lvl9pPr>
+              <a:defRPr sz="1600"/>
+            </a:lvl9pPr>
+          </a:lstStyle>
+          <a:p>
+            <a:pPr lvl="0"/>
+            <a:r>
+              <a:rPr lang="en-GB" dirty="0"/>
+              <a:t>Click to edit Master text styles</a:t>
+            </a:r>
+          </a:p>
+          <a:p>
+            <a:pPr lvl="1"/>
+            <a:r>
+              <a:rPr lang="en-GB" dirty="0"/>
+              <a:t>Second level</a:t>
+            </a:r>
+          </a:p>
+          <a:p>
+            <a:pPr lvl="2"/>
+            <a:r>
+              <a:rPr lang="en-GB" dirty="0"/>
+              <a:t>Third level</a:t>
+            </a:r>
+          </a:p>
+          <a:p>
+            <a:pPr lvl="3"/>
+            <a:r>
+              <a:rPr lang="en-GB" dirty="0"/>
+              <a:t>Fourth level</a:t>
+            </a:r>
+          </a:p>
+          <a:p>
+            <a:pPr lvl="4"/>
+            <a:r>
+              <a:rPr lang="en-GB" dirty="0"/>
+              <a:t>Fifth level</a:t>
+            </a:r>
+            <a:endParaRPr lang="en-US" dirty="0"/>
+          </a:p>
+        </p:txBody>
+      </p:sp>
+      <p:sp>
+        <p:nvSpPr>
+          <p:cNvPr id="4" name="Content Placeholder 2">
+            <a:extLst>
+              <a:ext uri="{FF2B5EF4-FFF2-40B4-BE49-F238E27FC236}">
+                <a16:creationId xmlns:a16="http://schemas.microsoft.com/office/drawing/2014/main" id="{D1BAB7DA-EC53-0103-E362-83F86BDB6BC4}"/>
+              </a:ext>
+            </a:extLst>
+          </p:cNvPr>
+          <p:cNvSpPr>
+            <a:spLocks noGrp="1"/>
+          </p:cNvSpPr>
+          <p:nvPr>
+            <p:ph idx="11"/>
+          </p:nvPr>
+        </p:nvSpPr>
+        <p:spPr>
+          <a:xfrm>
+            <a:off x="6235653" y="1619248"/>
+            <a:ext cx="5046518" cy="4233439"/>
+          </a:xfrm>
+          <a:prstGeom prst="rect">
+            <a:avLst/>
+          </a:prstGeom>
+        </p:spPr>
+        <p:txBody>
+          <a:bodyPr>
+            <a:normAutofit/>
+          </a:bodyPr>
+          <a:lstStyle>
+            <a:lvl1pPr>
+              <a:defRPr sz="1800"/>
+            </a:lvl1pPr>
+            <a:lvl2pPr>
+              <a:defRPr sz="1800"/>
+            </a:lvl2pPr>
+            <a:lvl3pPr>
+              <a:defRPr sz="1800"/>
+            </a:lvl3pPr>
+            <a:lvl4pPr>
+              <a:defRPr sz="1800"/>
+            </a:lvl4pPr>
+            <a:lvl5pPr>
+              <a:defRPr sz="1800"/>
+            </a:lvl5pPr>
+            <a:lvl6pPr>
+              <a:defRPr sz="1600"/>
+            </a:lvl6pPr>
+            <a:lvl7pPr>
+              <a:defRPr sz="1600"/>
+            </a:lvl7pPr>
+            <a:lvl8pPr>
+              <a:defRPr sz="1600"/>
+            </a:lvl8pPr>
+            <a:lvl9pPr>
+              <a:defRPr sz="1600"/>
+            </a:lvl9pPr>
+          </a:lstStyle>
+          <a:p>
+            <a:pPr lvl="0"/>
+            <a:r>
+              <a:rPr lang="en-GB" dirty="0"/>
+              <a:t>Click to edit Master text styles</a:t>
+            </a:r>
+          </a:p>
+          <a:p>
+            <a:pPr lvl="1"/>
+            <a:r>
+              <a:rPr lang="en-GB" dirty="0"/>
+              <a:t>Second level</a:t>
+            </a:r>
+          </a:p>
+          <a:p>
+            <a:pPr lvl="2"/>
+            <a:r>
+              <a:rPr lang="en-GB" dirty="0"/>
+              <a:t>Third level</a:t>
+            </a:r>
+          </a:p>
+          <a:p>
+            <a:pPr lvl="3"/>
+            <a:r>
+              <a:rPr lang="en-GB" dirty="0"/>
+              <a:t>Fourth level</a:t>
+            </a:r>
+          </a:p>
+          <a:p>
+            <a:pPr lvl="4"/>
+            <a:r>
+              <a:rPr lang="en-GB" dirty="0"/>
+              <a:t>Fifth level</a:t>
+            </a:r>
+            <a:endParaRPr lang="en-US" dirty="0"/>
+          </a:p>
+        </p:txBody>
+      </p:sp>
     </p:spTree>
     <p:extLst>
       <p:ext uri="{BB962C8B-B14F-4D97-AF65-F5344CB8AC3E}">
@@ -2505,9 +2790,12 @@
         </p:nvSpPr>
         <p:spPr>
           <a:xfrm>
-            <a:off x="5603747" y="2053950"/>
-            <a:ext cx="5678424" cy="3798739"/>
+            <a:off x="5603747" y="1619250"/>
+            <a:ext cx="5678424" cy="4233439"/>
           </a:xfrm>
+          <a:prstGeom prst="rect">
+            <a:avLst/>
+          </a:prstGeom>
         </p:spPr>
         <p:txBody>
           <a:bodyPr>
@@ -2582,79 +2870,6 @@
       </p:sp>
       <p:sp>
         <p:nvSpPr>
-          <p:cNvPr id="4" name="Text Placeholder 3"/>
-          <p:cNvSpPr>
-            <a:spLocks noGrp="1"/>
-          </p:cNvSpPr>
-          <p:nvPr>
-            <p:ph type="body" sz="half" idx="2"/>
-          </p:nvPr>
-        </p:nvSpPr>
-        <p:spPr>
-          <a:xfrm>
-            <a:off x="909829" y="2053950"/>
-            <a:ext cx="4389120" cy="3762294"/>
-          </a:xfrm>
-        </p:spPr>
-        <p:txBody>
-          <a:bodyPr lIns="91440" rIns="91440">
-            <a:normAutofit/>
-          </a:bodyPr>
-          <a:lstStyle>
-            <a:lvl1pPr marL="0" indent="0">
-              <a:lnSpc>
-                <a:spcPct val="108000"/>
-              </a:lnSpc>
-              <a:spcBef>
-                <a:spcPts val="600"/>
-              </a:spcBef>
-              <a:buNone/>
-              <a:defRPr sz="1800"/>
-            </a:lvl1pPr>
-            <a:lvl2pPr marL="457200" indent="0">
-              <a:buNone/>
-              <a:defRPr sz="1200"/>
-            </a:lvl2pPr>
-            <a:lvl3pPr marL="914400" indent="0">
-              <a:buNone/>
-              <a:defRPr sz="1000"/>
-            </a:lvl3pPr>
-            <a:lvl4pPr marL="1371600" indent="0">
-              <a:buNone/>
-              <a:defRPr sz="900"/>
-            </a:lvl4pPr>
-            <a:lvl5pPr marL="1828800" indent="0">
-              <a:buNone/>
-              <a:defRPr sz="900"/>
-            </a:lvl5pPr>
-            <a:lvl6pPr marL="2286000" indent="0">
-              <a:buNone/>
-              <a:defRPr sz="900"/>
-            </a:lvl6pPr>
-            <a:lvl7pPr marL="2743200" indent="0">
-              <a:buNone/>
-              <a:defRPr sz="900"/>
-            </a:lvl7pPr>
-            <a:lvl8pPr marL="3200400" indent="0">
-              <a:buNone/>
-              <a:defRPr sz="900"/>
-            </a:lvl8pPr>
-            <a:lvl9pPr marL="3657600" indent="0">
-              <a:buNone/>
-              <a:defRPr sz="900"/>
-            </a:lvl9pPr>
-          </a:lstStyle>
-          <a:p>
-            <a:pPr lvl="0"/>
-            <a:r>
-              <a:rPr lang="en-GB" dirty="0"/>
-              <a:t>Click to edit Master text styles</a:t>
-            </a:r>
-          </a:p>
-        </p:txBody>
-      </p:sp>
-      <p:sp>
-        <p:nvSpPr>
           <p:cNvPr id="9" name="Title 9">
             <a:extLst>
               <a:ext uri="{FF2B5EF4-FFF2-40B4-BE49-F238E27FC236}">
@@ -2671,13 +2886,19 @@
         </p:nvSpPr>
         <p:spPr>
           <a:xfrm>
-            <a:off x="909829" y="237744"/>
-            <a:ext cx="8434196" cy="1499616"/>
+            <a:off x="909829" y="428624"/>
+            <a:ext cx="8434196" cy="914401"/>
           </a:xfrm>
         </p:spPr>
         <p:txBody>
-          <a:bodyPr/>
-          <a:lstStyle/>
+          <a:bodyPr>
+            <a:normAutofit/>
+          </a:bodyPr>
+          <a:lstStyle>
+            <a:lvl1pPr>
+              <a:defRPr sz="3600"/>
+            </a:lvl1pPr>
+          </a:lstStyle>
           <a:p>
             <a:r>
               <a:rPr lang="en-GB" dirty="0"/>
@@ -2826,6 +3047,102 @@
           </a:p>
         </p:txBody>
       </p:sp>
+      <p:sp>
+        <p:nvSpPr>
+          <p:cNvPr id="4" name="Content Placeholder 2">
+            <a:extLst>
+              <a:ext uri="{FF2B5EF4-FFF2-40B4-BE49-F238E27FC236}">
+                <a16:creationId xmlns:a16="http://schemas.microsoft.com/office/drawing/2014/main" id="{DF61A5FC-3684-1BAC-1114-63C491ABAD76}"/>
+              </a:ext>
+            </a:extLst>
+          </p:cNvPr>
+          <p:cNvSpPr>
+            <a:spLocks noGrp="1"/>
+          </p:cNvSpPr>
+          <p:nvPr>
+            <p:ph idx="10"/>
+          </p:nvPr>
+        </p:nvSpPr>
+        <p:spPr>
+          <a:xfrm>
+            <a:off x="909829" y="1619249"/>
+            <a:ext cx="4405121" cy="4233439"/>
+          </a:xfrm>
+          <a:prstGeom prst="rect">
+            <a:avLst/>
+          </a:prstGeom>
+        </p:spPr>
+        <p:txBody>
+          <a:bodyPr>
+            <a:normAutofit/>
+          </a:bodyPr>
+          <a:lstStyle>
+            <a:lvl1pPr>
+              <a:defRPr sz="1800"/>
+            </a:lvl1pPr>
+            <a:lvl2pPr>
+              <a:defRPr sz="1800"/>
+            </a:lvl2pPr>
+            <a:lvl3pPr>
+              <a:defRPr sz="1800"/>
+            </a:lvl3pPr>
+            <a:lvl4pPr>
+              <a:defRPr sz="1800"/>
+            </a:lvl4pPr>
+            <a:lvl5pPr>
+              <a:defRPr sz="1800"/>
+            </a:lvl5pPr>
+            <a:lvl6pPr>
+              <a:defRPr sz="1600"/>
+            </a:lvl6pPr>
+            <a:lvl7pPr>
+              <a:defRPr sz="1600"/>
+            </a:lvl7pPr>
+            <a:lvl8pPr>
+              <a:defRPr sz="1600"/>
+            </a:lvl8pPr>
+            <a:lvl9pPr>
+              <a:defRPr sz="1600"/>
+            </a:lvl9pPr>
+          </a:lstStyle>
+          <a:p>
+            <a:pPr lvl="0"/>
+            <a:r>
+              <a:rPr lang="en-GB" dirty="0"/>
+              <a:t>Click to edit Master text styles</a:t>
+            </a:r>
+          </a:p>
+          <a:p>
+            <a:pPr lvl="1"/>
+            <a:r>
+              <a:rPr lang="en-GB" dirty="0"/>
+              <a:t>Second level</a:t>
+            </a:r>
+          </a:p>
+          <a:p>
+            <a:pPr lvl="2"/>
+            <a:r>
+              <a:rPr lang="en-GB" dirty="0"/>
+              <a:t>Third level</a:t>
+            </a:r>
+          </a:p>
+          <a:p>
+            <a:pPr lvl="3"/>
+            <a:r>
+              <a:rPr lang="en-GB" dirty="0"/>
+              <a:t>Fourth level</a:t>
+            </a:r>
+          </a:p>
+          <a:p>
+            <a:pPr lvl="4"/>
+            <a:r>
+              <a:rPr lang="en-GB" dirty="0"/>
+              <a:t>Fifth level</a:t>
+            </a:r>
+            <a:endParaRPr lang="en-US" dirty="0"/>
+          </a:p>
+        </p:txBody>
+      </p:sp>
     </p:spTree>
     <p:extLst>
       <p:ext uri="{BB962C8B-B14F-4D97-AF65-F5344CB8AC3E}">
@@ -2866,10 +3183,21 @@
             <p:ph type="title" hasCustomPrompt="1"/>
           </p:nvPr>
         </p:nvSpPr>
-        <p:spPr/>
+        <p:spPr>
+          <a:xfrm>
+            <a:off x="909829" y="438150"/>
+            <a:ext cx="8434196" cy="914400"/>
+          </a:xfrm>
+        </p:spPr>
         <p:txBody>
-          <a:bodyPr/>
-          <a:lstStyle/>
+          <a:bodyPr>
+            <a:normAutofit/>
+          </a:bodyPr>
+          <a:lstStyle>
+            <a:lvl1pPr>
+              <a:defRPr sz="3600"/>
+            </a:lvl1pPr>
+          </a:lstStyle>
           <a:p>
             <a:r>
               <a:rPr lang="en-GB" dirty="0"/>
@@ -2891,9 +3219,12 @@
         </p:nvSpPr>
         <p:spPr>
           <a:xfrm>
-            <a:off x="909828" y="1911308"/>
-            <a:ext cx="11083698" cy="460417"/>
+            <a:off x="909829" y="1550608"/>
+            <a:ext cx="10243946" cy="460417"/>
           </a:xfrm>
+          <a:prstGeom prst="rect">
+            <a:avLst/>
+          </a:prstGeom>
         </p:spPr>
         <p:txBody>
           <a:bodyPr anchor="ctr"/>
@@ -2937,80 +3268,6 @@
               <a:rPr lang="en-US" dirty="0"/>
               <a:t>Add sensitivity if needed</a:t>
             </a:r>
-          </a:p>
-        </p:txBody>
-      </p:sp>
-      <p:sp>
-        <p:nvSpPr>
-          <p:cNvPr id="4" name="Picture Placeholder 2">
-            <a:extLst>
-              <a:ext uri="{FF2B5EF4-FFF2-40B4-BE49-F238E27FC236}">
-                <a16:creationId xmlns:a16="http://schemas.microsoft.com/office/drawing/2014/main" id="{3624C560-4E3C-7F23-9A71-5ECD5129CBDE}"/>
-              </a:ext>
-            </a:extLst>
-          </p:cNvPr>
-          <p:cNvSpPr>
-            <a:spLocks noGrp="1" noChangeAspect="1"/>
-          </p:cNvSpPr>
-          <p:nvPr>
-            <p:ph type="pic" idx="12"/>
-          </p:nvPr>
-        </p:nvSpPr>
-        <p:spPr>
-          <a:xfrm>
-            <a:off x="884301" y="2411684"/>
-            <a:ext cx="5041792" cy="3518177"/>
-          </a:xfrm>
-          <a:solidFill>
-            <a:srgbClr val="046AAA"/>
-          </a:solidFill>
-        </p:spPr>
-        <p:txBody>
-          <a:bodyPr lIns="457200" tIns="365760" rIns="45720" bIns="45720" anchor="t"/>
-          <a:lstStyle>
-            <a:lvl1pPr marL="0" indent="0">
-              <a:buNone/>
-              <a:defRPr sz="3200"/>
-            </a:lvl1pPr>
-            <a:lvl2pPr marL="457200" indent="0">
-              <a:buNone/>
-              <a:defRPr sz="2800"/>
-            </a:lvl2pPr>
-            <a:lvl3pPr marL="914400" indent="0">
-              <a:buNone/>
-              <a:defRPr sz="2400"/>
-            </a:lvl3pPr>
-            <a:lvl4pPr marL="1371600" indent="0">
-              <a:buNone/>
-              <a:defRPr sz="2000"/>
-            </a:lvl4pPr>
-            <a:lvl5pPr marL="1828800" indent="0">
-              <a:buNone/>
-              <a:defRPr sz="2000"/>
-            </a:lvl5pPr>
-            <a:lvl6pPr marL="2286000" indent="0">
-              <a:buNone/>
-              <a:defRPr sz="2000"/>
-            </a:lvl6pPr>
-            <a:lvl7pPr marL="2743200" indent="0">
-              <a:buNone/>
-              <a:defRPr sz="2000"/>
-            </a:lvl7pPr>
-            <a:lvl8pPr marL="3200400" indent="0">
-              <a:buNone/>
-              <a:defRPr sz="2000"/>
-            </a:lvl8pPr>
-            <a:lvl9pPr marL="3657600" indent="0">
-              <a:buNone/>
-              <a:defRPr sz="2000"/>
-            </a:lvl9pPr>
-          </a:lstStyle>
-          <a:p>
-            <a:r>
-              <a:rPr lang="en-GB" dirty="0"/>
-              <a:t>Click icon to add picture</a:t>
-            </a:r>
-            <a:endParaRPr lang="en-US" dirty="0"/>
           </a:p>
         </p:txBody>
       </p:sp>
@@ -3147,6 +3404,72 @@
           </a:p>
         </p:txBody>
       </p:sp>
+      <p:sp>
+        <p:nvSpPr>
+          <p:cNvPr id="8" name="Content Placeholder 7">
+            <a:extLst>
+              <a:ext uri="{FF2B5EF4-FFF2-40B4-BE49-F238E27FC236}">
+                <a16:creationId xmlns:a16="http://schemas.microsoft.com/office/drawing/2014/main" id="{E661F691-68A2-ACF8-5D27-3F5571B6FD79}"/>
+              </a:ext>
+            </a:extLst>
+          </p:cNvPr>
+          <p:cNvSpPr>
+            <a:spLocks noGrp="1"/>
+          </p:cNvSpPr>
+          <p:nvPr>
+            <p:ph sz="quarter" idx="12"/>
+          </p:nvPr>
+        </p:nvSpPr>
+        <p:spPr>
+          <a:xfrm>
+            <a:off x="909638" y="2228850"/>
+            <a:ext cx="7015162" cy="3695700"/>
+          </a:xfrm>
+          <a:prstGeom prst="rect">
+            <a:avLst/>
+          </a:prstGeom>
+        </p:spPr>
+        <p:txBody>
+          <a:bodyPr/>
+          <a:lstStyle/>
+          <a:p>
+            <a:pPr lvl="0"/>
+            <a:r>
+              <a:rPr lang="en-US"/>
+              <a:t>Click to edit Master text styles</a:t>
+            </a:r>
+          </a:p>
+          <a:p>
+            <a:pPr lvl="1"/>
+            <a:r>
+              <a:rPr lang="en-US"/>
+              <a:t>Second level</a:t>
+            </a:r>
+          </a:p>
+          <a:p>
+            <a:pPr lvl="2"/>
+            <a:r>
+              <a:rPr lang="en-US"/>
+              <a:t>Third level</a:t>
+            </a:r>
+          </a:p>
+          <a:p>
+            <a:pPr lvl="3"/>
+            <a:r>
+              <a:rPr lang="en-US"/>
+              <a:t>Fourth level</a:t>
+            </a:r>
+          </a:p>
+          <a:p>
+            <a:pPr lvl="4"/>
+            <a:r>
+              <a:rPr lang="en-US"/>
+              <a:t>Fifth level</a:t>
+            </a:r>
+            <a:endParaRPr lang="en-GB"/>
+          </a:p>
+        </p:txBody>
+      </p:sp>
     </p:spTree>
     <p:extLst>
       <p:ext uri="{BB962C8B-B14F-4D97-AF65-F5344CB8AC3E}">
@@ -3200,7 +3523,7 @@
           <a:p>
             <a:fld id="{0EB35C0E-E263-0848-A698-EE526CA39358}" type="datetimeFigureOut">
               <a:rPr lang="en-US" smtClean="0"/>
-              <a:t>5/14/2024</a:t>
+              <a:t>5/20/2024</a:t>
             </a:fld>
             <a:endParaRPr lang="en-US" dirty="0"/>
           </a:p>
@@ -3300,10 +3623,21 @@
             <p:ph type="title" hasCustomPrompt="1"/>
           </p:nvPr>
         </p:nvSpPr>
-        <p:spPr/>
+        <p:spPr>
+          <a:xfrm>
+            <a:off x="909829" y="403765"/>
+            <a:ext cx="8434196" cy="976056"/>
+          </a:xfrm>
+        </p:spPr>
         <p:txBody>
-          <a:bodyPr/>
-          <a:lstStyle/>
+          <a:bodyPr>
+            <a:normAutofit/>
+          </a:bodyPr>
+          <a:lstStyle>
+            <a:lvl1pPr>
+              <a:defRPr sz="3600"/>
+            </a:lvl1pPr>
+          </a:lstStyle>
           <a:p>
             <a:r>
               <a:rPr lang="en-GB" dirty="0"/>
@@ -3325,9 +3659,12 @@
         </p:nvSpPr>
         <p:spPr>
           <a:xfrm>
-            <a:off x="909828" y="1911308"/>
-            <a:ext cx="10420160" cy="3915333"/>
+            <a:off x="909828" y="1737360"/>
+            <a:ext cx="10420160" cy="4089281"/>
           </a:xfrm>
+          <a:prstGeom prst="rect">
+            <a:avLst/>
+          </a:prstGeom>
         </p:spPr>
         <p:txBody>
           <a:bodyPr/>
@@ -3634,6 +3971,289 @@
           <a:chExt cx="0" cy="0"/>
         </a:xfrm>
       </p:grpSpPr>
+      <p:sp>
+        <p:nvSpPr>
+          <p:cNvPr id="4" name="Content Placeholder 2">
+            <a:extLst>
+              <a:ext uri="{FF2B5EF4-FFF2-40B4-BE49-F238E27FC236}">
+                <a16:creationId xmlns:a16="http://schemas.microsoft.com/office/drawing/2014/main" id="{456AE61C-CB53-A51B-2E3D-419A782B4757}"/>
+              </a:ext>
+            </a:extLst>
+          </p:cNvPr>
+          <p:cNvSpPr txBox="1">
+            <a:spLocks/>
+          </p:cNvSpPr>
+          <p:nvPr userDrawn="1"/>
+        </p:nvSpPr>
+        <p:spPr>
+          <a:xfrm>
+            <a:off x="909828" y="1619249"/>
+            <a:ext cx="10420159" cy="4233439"/>
+          </a:xfrm>
+          <a:prstGeom prst="rect">
+            <a:avLst/>
+          </a:prstGeom>
+        </p:spPr>
+        <p:txBody>
+          <a:bodyPr>
+            <a:normAutofit/>
+          </a:bodyPr>
+          <a:lstStyle>
+            <a:lvl1pPr marL="91440" indent="-91440" algn="l" defTabSz="914400" rtl="0" eaLnBrk="1" latinLnBrk="0" hangingPunct="1">
+              <a:lnSpc>
+                <a:spcPct val="90000"/>
+              </a:lnSpc>
+              <a:spcBef>
+                <a:spcPts val="1200"/>
+              </a:spcBef>
+              <a:spcAft>
+                <a:spcPts val="200"/>
+              </a:spcAft>
+              <a:buClr>
+                <a:schemeClr val="accent1"/>
+              </a:buClr>
+              <a:buSzPct val="100000"/>
+              <a:buFont typeface="Tw Cen MT" panose="020B0602020104020603" pitchFamily="34" charset="0"/>
+              <a:buChar char=" "/>
+              <a:defRPr sz="1800" kern="1200">
+                <a:solidFill>
+                  <a:schemeClr val="tx1"/>
+                </a:solidFill>
+                <a:latin typeface="Aptos" panose="020B0004020202020204" pitchFamily="34" charset="0"/>
+                <a:ea typeface="+mn-ea"/>
+                <a:cs typeface="Arial" panose="020B0604020202020204" pitchFamily="34" charset="0"/>
+              </a:defRPr>
+            </a:lvl1pPr>
+            <a:lvl2pPr marL="265176" indent="-137160" algn="l" defTabSz="914400" rtl="0" eaLnBrk="1" latinLnBrk="0" hangingPunct="1">
+              <a:lnSpc>
+                <a:spcPct val="90000"/>
+              </a:lnSpc>
+              <a:spcBef>
+                <a:spcPts val="200"/>
+              </a:spcBef>
+              <a:spcAft>
+                <a:spcPts val="400"/>
+              </a:spcAft>
+              <a:buClr>
+                <a:schemeClr val="accent1"/>
+              </a:buClr>
+              <a:buFont typeface="Wingdings 3" pitchFamily="18" charset="2"/>
+              <a:buChar char=""/>
+              <a:defRPr sz="1800" kern="1200">
+                <a:solidFill>
+                  <a:schemeClr val="tx1"/>
+                </a:solidFill>
+                <a:latin typeface="Aptos" panose="020B0004020202020204" pitchFamily="34" charset="0"/>
+                <a:ea typeface="+mn-ea"/>
+                <a:cs typeface="Arial" panose="020B0604020202020204" pitchFamily="34" charset="0"/>
+              </a:defRPr>
+            </a:lvl2pPr>
+            <a:lvl3pPr marL="448056" indent="-137160" algn="l" defTabSz="914400" rtl="0" eaLnBrk="1" latinLnBrk="0" hangingPunct="1">
+              <a:lnSpc>
+                <a:spcPct val="90000"/>
+              </a:lnSpc>
+              <a:spcBef>
+                <a:spcPts val="200"/>
+              </a:spcBef>
+              <a:spcAft>
+                <a:spcPts val="400"/>
+              </a:spcAft>
+              <a:buClr>
+                <a:schemeClr val="accent1"/>
+              </a:buClr>
+              <a:buFont typeface="Wingdings 3" pitchFamily="18" charset="2"/>
+              <a:buChar char=""/>
+              <a:defRPr sz="1800" kern="1200">
+                <a:solidFill>
+                  <a:schemeClr val="tx1"/>
+                </a:solidFill>
+                <a:latin typeface="Aptos" panose="020B0004020202020204" pitchFamily="34" charset="0"/>
+                <a:ea typeface="+mn-ea"/>
+                <a:cs typeface="Arial" panose="020B0604020202020204" pitchFamily="34" charset="0"/>
+              </a:defRPr>
+            </a:lvl3pPr>
+            <a:lvl4pPr marL="594360" indent="-137160" algn="l" defTabSz="914400" rtl="0" eaLnBrk="1" latinLnBrk="0" hangingPunct="1">
+              <a:lnSpc>
+                <a:spcPct val="90000"/>
+              </a:lnSpc>
+              <a:spcBef>
+                <a:spcPts val="200"/>
+              </a:spcBef>
+              <a:spcAft>
+                <a:spcPts val="400"/>
+              </a:spcAft>
+              <a:buClr>
+                <a:schemeClr val="accent1"/>
+              </a:buClr>
+              <a:buFont typeface="Wingdings 3" pitchFamily="18" charset="2"/>
+              <a:buChar char=""/>
+              <a:defRPr sz="1800" kern="1200">
+                <a:solidFill>
+                  <a:schemeClr val="tx1"/>
+                </a:solidFill>
+                <a:latin typeface="Aptos" panose="020B0004020202020204" pitchFamily="34" charset="0"/>
+                <a:ea typeface="+mn-ea"/>
+                <a:cs typeface="Arial" panose="020B0604020202020204" pitchFamily="34" charset="0"/>
+              </a:defRPr>
+            </a:lvl4pPr>
+            <a:lvl5pPr marL="777240" indent="-137160" algn="l" defTabSz="914400" rtl="0" eaLnBrk="1" latinLnBrk="0" hangingPunct="1">
+              <a:lnSpc>
+                <a:spcPct val="90000"/>
+              </a:lnSpc>
+              <a:spcBef>
+                <a:spcPts val="200"/>
+              </a:spcBef>
+              <a:spcAft>
+                <a:spcPts val="400"/>
+              </a:spcAft>
+              <a:buClr>
+                <a:schemeClr val="accent1"/>
+              </a:buClr>
+              <a:buFont typeface="Wingdings 3" pitchFamily="18" charset="2"/>
+              <a:buChar char=""/>
+              <a:defRPr sz="1800" kern="1200">
+                <a:solidFill>
+                  <a:schemeClr val="tx1"/>
+                </a:solidFill>
+                <a:latin typeface="Aptos" panose="020B0004020202020204" pitchFamily="34" charset="0"/>
+                <a:ea typeface="+mn-ea"/>
+                <a:cs typeface="Arial" panose="020B0604020202020204" pitchFamily="34" charset="0"/>
+              </a:defRPr>
+            </a:lvl5pPr>
+            <a:lvl6pPr marL="914400" indent="-137160" algn="l" defTabSz="914400" rtl="0" eaLnBrk="1" latinLnBrk="0" hangingPunct="1">
+              <a:lnSpc>
+                <a:spcPct val="90000"/>
+              </a:lnSpc>
+              <a:spcBef>
+                <a:spcPts val="200"/>
+              </a:spcBef>
+              <a:spcAft>
+                <a:spcPts val="400"/>
+              </a:spcAft>
+              <a:buClr>
+                <a:schemeClr val="accent1"/>
+              </a:buClr>
+              <a:buFont typeface="Wingdings 3" pitchFamily="18" charset="2"/>
+              <a:buChar char=""/>
+              <a:defRPr sz="1600" kern="1200">
+                <a:solidFill>
+                  <a:schemeClr val="tx1"/>
+                </a:solidFill>
+                <a:latin typeface="+mn-lt"/>
+                <a:ea typeface="+mn-ea"/>
+                <a:cs typeface="+mn-cs"/>
+              </a:defRPr>
+            </a:lvl6pPr>
+            <a:lvl7pPr marL="1060704" indent="-137160" algn="l" defTabSz="914400" rtl="0" eaLnBrk="1" latinLnBrk="0" hangingPunct="1">
+              <a:lnSpc>
+                <a:spcPct val="90000"/>
+              </a:lnSpc>
+              <a:spcBef>
+                <a:spcPts val="200"/>
+              </a:spcBef>
+              <a:spcAft>
+                <a:spcPts val="400"/>
+              </a:spcAft>
+              <a:buClr>
+                <a:schemeClr val="accent1"/>
+              </a:buClr>
+              <a:buFont typeface="Wingdings 3" pitchFamily="18" charset="2"/>
+              <a:buChar char=""/>
+              <a:defRPr sz="1600" kern="1200">
+                <a:solidFill>
+                  <a:schemeClr val="tx1"/>
+                </a:solidFill>
+                <a:latin typeface="+mn-lt"/>
+                <a:ea typeface="+mn-ea"/>
+                <a:cs typeface="+mn-cs"/>
+              </a:defRPr>
+            </a:lvl7pPr>
+            <a:lvl8pPr marL="1216152" indent="-137160" algn="l" defTabSz="914400" rtl="0" eaLnBrk="1" latinLnBrk="0" hangingPunct="1">
+              <a:lnSpc>
+                <a:spcPct val="90000"/>
+              </a:lnSpc>
+              <a:spcBef>
+                <a:spcPts val="200"/>
+              </a:spcBef>
+              <a:spcAft>
+                <a:spcPts val="400"/>
+              </a:spcAft>
+              <a:buClr>
+                <a:schemeClr val="accent1"/>
+              </a:buClr>
+              <a:buFont typeface="Wingdings 3" pitchFamily="18" charset="2"/>
+              <a:buChar char=""/>
+              <a:defRPr sz="1600" kern="1200">
+                <a:solidFill>
+                  <a:schemeClr val="tx1"/>
+                </a:solidFill>
+                <a:latin typeface="+mn-lt"/>
+                <a:ea typeface="+mn-ea"/>
+                <a:cs typeface="+mn-cs"/>
+              </a:defRPr>
+            </a:lvl8pPr>
+            <a:lvl9pPr marL="1362456" indent="-137160" algn="l" defTabSz="914400" rtl="0" eaLnBrk="1" latinLnBrk="0" hangingPunct="1">
+              <a:lnSpc>
+                <a:spcPct val="90000"/>
+              </a:lnSpc>
+              <a:spcBef>
+                <a:spcPts val="200"/>
+              </a:spcBef>
+              <a:spcAft>
+                <a:spcPts val="400"/>
+              </a:spcAft>
+              <a:buClr>
+                <a:schemeClr val="accent1"/>
+              </a:buClr>
+              <a:buFont typeface="Wingdings 3" pitchFamily="18" charset="2"/>
+              <a:buChar char=""/>
+              <a:defRPr sz="1600" kern="1200">
+                <a:solidFill>
+                  <a:schemeClr val="tx1"/>
+                </a:solidFill>
+                <a:latin typeface="+mn-lt"/>
+                <a:ea typeface="+mn-ea"/>
+                <a:cs typeface="+mn-cs"/>
+              </a:defRPr>
+            </a:lvl9pPr>
+          </a:lstStyle>
+          <a:p>
+            <a:r>
+              <a:rPr lang="en-GB"/>
+              <a:t>Click to edit Master text styles</a:t>
+            </a:r>
+          </a:p>
+          <a:p>
+            <a:pPr lvl="1"/>
+            <a:r>
+              <a:rPr lang="en-GB"/>
+              <a:t>Second level</a:t>
+            </a:r>
+          </a:p>
+          <a:p>
+            <a:pPr lvl="2"/>
+            <a:r>
+              <a:rPr lang="en-GB"/>
+              <a:t>Third level</a:t>
+            </a:r>
+          </a:p>
+          <a:p>
+            <a:pPr lvl="3"/>
+            <a:r>
+              <a:rPr lang="en-GB"/>
+              <a:t>Fourth level</a:t>
+            </a:r>
+          </a:p>
+          <a:p>
+            <a:pPr lvl="4"/>
+            <a:r>
+              <a:rPr lang="en-GB"/>
+              <a:t>Fifth level</a:t>
+            </a:r>
+            <a:endParaRPr lang="en-US" dirty="0"/>
+          </a:p>
+        </p:txBody>
+      </p:sp>
       <p:pic>
         <p:nvPicPr>
           <p:cNvPr id="8" name="Picture 7" descr="A blue line with a white background">
@@ -3675,8 +4295,8 @@
         </p:nvSpPr>
         <p:spPr>
           <a:xfrm>
-            <a:off x="909829" y="237744"/>
-            <a:ext cx="8434196" cy="1499616"/>
+            <a:off x="909829" y="429900"/>
+            <a:ext cx="8434196" cy="914400"/>
           </a:xfrm>
           <a:prstGeom prst="rect">
             <a:avLst/>
@@ -3708,8 +4328,8 @@
         </p:nvSpPr>
         <p:spPr>
           <a:xfrm>
-            <a:off x="909828" y="1975104"/>
-            <a:ext cx="10420160" cy="3754184"/>
+            <a:off x="909828" y="1695450"/>
+            <a:ext cx="10420160" cy="4033838"/>
           </a:xfrm>
           <a:prstGeom prst="rect">
             <a:avLst/>
@@ -3905,7 +4525,7 @@
           <a:spcPct val="0"/>
         </a:spcBef>
         <a:buNone/>
-        <a:defRPr sz="4400" b="1" kern="1200" cap="none" spc="100" baseline="0">
+        <a:defRPr sz="3600" b="1" kern="1200" cap="none" spc="100" baseline="0">
           <a:solidFill>
             <a:schemeClr val="tx1">
               <a:lumMod val="95000"/>
@@ -6252,7 +6872,9 @@
         </p:nvSpPr>
         <p:spPr/>
         <p:txBody>
-          <a:bodyPr/>
+          <a:bodyPr>
+            <a:normAutofit fontScale="90000"/>
+          </a:bodyPr>
           <a:lstStyle/>
           <a:p>
             <a:r>
@@ -8708,10 +9330,18 @@
             <a:spLocks noGrp="1"/>
           </p:cNvSpPr>
           <p:nvPr>
-            <p:ph type="body" sz="half" idx="2"/>
+            <p:ph type="body" sz="half" idx="4294967295"/>
           </p:nvPr>
         </p:nvSpPr>
-        <p:spPr/>
+        <p:spPr>
+          <a:xfrm>
+            <a:off x="909829" y="1623421"/>
+            <a:ext cx="4389120" cy="4192823"/>
+          </a:xfrm>
+          <a:prstGeom prst="rect">
+            <a:avLst/>
+          </a:prstGeom>
+        </p:spPr>
         <p:txBody>
           <a:bodyPr/>
           <a:lstStyle/>
@@ -8813,10 +9443,18 @@
             <a:spLocks noGrp="1"/>
           </p:cNvSpPr>
           <p:nvPr>
-            <p:ph sz="half" idx="1"/>
+            <p:ph sz="half" idx="4294967295"/>
           </p:nvPr>
         </p:nvSpPr>
-        <p:spPr/>
+        <p:spPr>
+          <a:xfrm>
+            <a:off x="1024127" y="1998070"/>
+            <a:ext cx="4754880" cy="3871102"/>
+          </a:xfrm>
+          <a:prstGeom prst="rect">
+            <a:avLst/>
+          </a:prstGeom>
+        </p:spPr>
         <p:txBody>
           <a:bodyPr/>
           <a:lstStyle/>
@@ -8838,10 +9476,18 @@
             <a:spLocks noGrp="1"/>
           </p:cNvSpPr>
           <p:nvPr>
-            <p:ph sz="half" idx="2"/>
+            <p:ph sz="half" idx="4294967295"/>
           </p:nvPr>
         </p:nvSpPr>
-        <p:spPr/>
+        <p:spPr>
+          <a:xfrm>
+            <a:off x="5989319" y="1998070"/>
+            <a:ext cx="4754880" cy="3871102"/>
+          </a:xfrm>
+          <a:prstGeom prst="rect">
+            <a:avLst/>
+          </a:prstGeom>
+        </p:spPr>
         <p:txBody>
           <a:bodyPr/>
           <a:lstStyle/>
@@ -9545,15 +10191,6 @@
 </file>
 
 <file path=customXml/item1.xml><?xml version="1.0" encoding="utf-8"?>
-<?mso-contentType ?>
-<FormTemplates xmlns="http://schemas.microsoft.com/sharepoint/v3/contenttype/forms">
-  <Display>DocumentLibraryForm</Display>
-  <Edit>DocumentLibraryForm</Edit>
-  <New>DocumentLibraryForm</New>
-</FormTemplates>
-</file>
-
-<file path=customXml/item2.xml><?xml version="1.0" encoding="utf-8"?>
 <p:properties xmlns:p="http://schemas.microsoft.com/office/2006/metadata/properties" xmlns:xsi="http://www.w3.org/2001/XMLSchema-instance" xmlns:pc="http://schemas.microsoft.com/office/infopath/2007/PartnerControls">
   <documentManagement>
     <TaxCatchAll xmlns="6fbcc8e4-81ed-40b2-9b21-aa98bc8e658d"/>
@@ -9562,6 +10199,15 @@
     </lcf76f155ced4ddcb4097134ff3c332f>
   </documentManagement>
 </p:properties>
+</file>
+
+<file path=customXml/item2.xml><?xml version="1.0" encoding="utf-8"?>
+<?mso-contentType ?>
+<FormTemplates xmlns="http://schemas.microsoft.com/sharepoint/v3/contenttype/forms">
+  <Display>DocumentLibraryForm</Display>
+  <Edit>DocumentLibraryForm</Edit>
+  <New>DocumentLibraryForm</New>
+</FormTemplates>
 </file>
 
 <file path=customXml/item3.xml><?xml version="1.0" encoding="utf-8"?>
@@ -9820,14 +10466,6 @@
 </file>
 
 <file path=customXml/itemProps1.xml><?xml version="1.0" encoding="utf-8"?>
-<ds:datastoreItem xmlns:ds="http://schemas.openxmlformats.org/officeDocument/2006/customXml" ds:itemID="{E9F1E26B-D07C-4C90-911C-DDBB2DD1DC89}">
-  <ds:schemaRefs>
-    <ds:schemaRef ds:uri="http://schemas.microsoft.com/sharepoint/v3/contenttype/forms"/>
-  </ds:schemaRefs>
-</ds:datastoreItem>
-</file>
-
-<file path=customXml/itemProps2.xml><?xml version="1.0" encoding="utf-8"?>
 <ds:datastoreItem xmlns:ds="http://schemas.openxmlformats.org/officeDocument/2006/customXml" ds:itemID="{97E2E476-1148-42D4-979E-2DA976947740}">
   <ds:schemaRefs>
     <ds:schemaRef ds:uri="http://schemas.microsoft.com/office/infopath/2007/PartnerControls"/>
@@ -9840,6 +10478,14 @@
     <ds:schemaRef ds:uri="6303f13c-72cc-47f0-aeed-d46f93b29717"/>
     <ds:schemaRef ds:uri="http://schemas.microsoft.com/office/2006/metadata/properties"/>
     <ds:schemaRef ds:uri="http://purl.org/dc/terms/"/>
+  </ds:schemaRefs>
+</ds:datastoreItem>
+</file>
+
+<file path=customXml/itemProps2.xml><?xml version="1.0" encoding="utf-8"?>
+<ds:datastoreItem xmlns:ds="http://schemas.openxmlformats.org/officeDocument/2006/customXml" ds:itemID="{E9F1E26B-D07C-4C90-911C-DDBB2DD1DC89}">
+  <ds:schemaRefs>
+    <ds:schemaRef ds:uri="http://schemas.microsoft.com/sharepoint/v3/contenttype/forms"/>
   </ds:schemaRefs>
 </ds:datastoreItem>
 </file>

--- a/template.pptx
+++ b/template.pptx
@@ -130,7 +130,7 @@
 <file path=ppt/revisionInfo.xml><?xml version="1.0" encoding="utf-8"?>
 <p1510:revInfo xmlns:a="http://schemas.openxmlformats.org/drawingml/2006/main" xmlns:r="http://schemas.openxmlformats.org/officeDocument/2006/relationships" xmlns:p1510="http://schemas.microsoft.com/office/powerpoint/2015/10/main">
   <p1510:revLst>
-    <p1510:client id="{F7BFCCB5-6F60-4B4C-8F2B-82E3B95F8D19}" v="28" dt="2024-05-20T10:26:12.010"/>
+    <p1510:client id="{F7BFCCB5-6F60-4B4C-8F2B-82E3B95F8D19}" v="34" dt="2024-05-21T11:11:56.741"/>
   </p1510:revLst>
 </p1510:revInfo>
 </file>
@@ -140,7 +140,7 @@
   <pc:docChgLst>
     <pc:chgData name="Andrew Hood (Strategy Unit, hosted by ML)" userId="8780178f-c962-4518-a070-fd8292572a75" providerId="ADAL" clId="{F7BFCCB5-6F60-4B4C-8F2B-82E3B95F8D19}"/>
     <pc:docChg chg="undo custSel modSld delMainMaster modMainMaster">
-      <pc:chgData name="Andrew Hood (Strategy Unit, hosted by ML)" userId="8780178f-c962-4518-a070-fd8292572a75" providerId="ADAL" clId="{F7BFCCB5-6F60-4B4C-8F2B-82E3B95F8D19}" dt="2024-05-20T10:26:12.880" v="158" actId="478"/>
+      <pc:chgData name="Andrew Hood (Strategy Unit, hosted by ML)" userId="8780178f-c962-4518-a070-fd8292572a75" providerId="ADAL" clId="{F7BFCCB5-6F60-4B4C-8F2B-82E3B95F8D19}" dt="2024-05-21T12:43:15.363" v="186" actId="242"/>
       <pc:docMkLst>
         <pc:docMk/>
       </pc:docMkLst>
@@ -184,11 +184,19 @@
         </pc:spChg>
       </pc:sldChg>
       <pc:sldChg chg="addSp delSp modSp mod modClrScheme chgLayout">
-        <pc:chgData name="Andrew Hood (Strategy Unit, hosted by ML)" userId="8780178f-c962-4518-a070-fd8292572a75" providerId="ADAL" clId="{F7BFCCB5-6F60-4B4C-8F2B-82E3B95F8D19}" dt="2024-05-14T15:42:58.344" v="28" actId="700"/>
+        <pc:chgData name="Andrew Hood (Strategy Unit, hosted by ML)" userId="8780178f-c962-4518-a070-fd8292572a75" providerId="ADAL" clId="{F7BFCCB5-6F60-4B4C-8F2B-82E3B95F8D19}" dt="2024-05-21T11:11:44.990" v="178" actId="27636"/>
         <pc:sldMkLst>
           <pc:docMk/>
           <pc:sldMk cId="3090482787" sldId="258"/>
         </pc:sldMkLst>
+        <pc:spChg chg="add del mod">
+          <ac:chgData name="Andrew Hood (Strategy Unit, hosted by ML)" userId="8780178f-c962-4518-a070-fd8292572a75" providerId="ADAL" clId="{F7BFCCB5-6F60-4B4C-8F2B-82E3B95F8D19}" dt="2024-05-20T14:43:51.836" v="167" actId="478"/>
+          <ac:spMkLst>
+            <pc:docMk/>
+            <pc:sldMk cId="3090482787" sldId="258"/>
+            <ac:spMk id="2" creationId="{A0E6B134-0CCA-5D54-229C-550A67308B51}"/>
+          </ac:spMkLst>
+        </pc:spChg>
         <pc:spChg chg="del mod ord">
           <ac:chgData name="Andrew Hood (Strategy Unit, hosted by ML)" userId="8780178f-c962-4518-a070-fd8292572a75" providerId="ADAL" clId="{F7BFCCB5-6F60-4B4C-8F2B-82E3B95F8D19}" dt="2024-05-14T15:42:58.344" v="28" actId="700"/>
           <ac:spMkLst>
@@ -205,6 +213,22 @@
             <ac:spMk id="3" creationId="{7F52082A-A5B1-4491-6367-CFD8C76721D3}"/>
           </ac:spMkLst>
         </pc:spChg>
+        <pc:spChg chg="add del mod ord">
+          <ac:chgData name="Andrew Hood (Strategy Unit, hosted by ML)" userId="8780178f-c962-4518-a070-fd8292572a75" providerId="ADAL" clId="{F7BFCCB5-6F60-4B4C-8F2B-82E3B95F8D19}" dt="2024-05-20T14:44:25.680" v="172" actId="700"/>
+          <ac:spMkLst>
+            <pc:docMk/>
+            <pc:sldMk cId="3090482787" sldId="258"/>
+            <ac:spMk id="3" creationId="{F14BF9ED-A258-CC4B-61EA-40EC0C4F92FB}"/>
+          </ac:spMkLst>
+        </pc:spChg>
+        <pc:spChg chg="add del mod ord">
+          <ac:chgData name="Andrew Hood (Strategy Unit, hosted by ML)" userId="8780178f-c962-4518-a070-fd8292572a75" providerId="ADAL" clId="{F7BFCCB5-6F60-4B4C-8F2B-82E3B95F8D19}" dt="2024-05-20T14:44:20.913" v="171"/>
+          <ac:spMkLst>
+            <pc:docMk/>
+            <pc:sldMk cId="3090482787" sldId="258"/>
+            <ac:spMk id="4" creationId="{035BE814-D8A8-63E3-340A-832F9B5D152A}"/>
+          </ac:spMkLst>
+        </pc:spChg>
         <pc:spChg chg="del mod ord">
           <ac:chgData name="Andrew Hood (Strategy Unit, hosted by ML)" userId="8780178f-c962-4518-a070-fd8292572a75" providerId="ADAL" clId="{F7BFCCB5-6F60-4B4C-8F2B-82E3B95F8D19}" dt="2024-05-14T15:42:58.344" v="28" actId="700"/>
           <ac:spMkLst>
@@ -213,30 +237,54 @@
             <ac:spMk id="4" creationId="{61CFEE78-B33C-9290-7324-9A033F6EA25A}"/>
           </ac:spMkLst>
         </pc:spChg>
-        <pc:spChg chg="add mod ord">
-          <ac:chgData name="Andrew Hood (Strategy Unit, hosted by ML)" userId="8780178f-c962-4518-a070-fd8292572a75" providerId="ADAL" clId="{F7BFCCB5-6F60-4B4C-8F2B-82E3B95F8D19}" dt="2024-05-14T15:42:58.344" v="28" actId="700"/>
+        <pc:spChg chg="add del mod ord">
+          <ac:chgData name="Andrew Hood (Strategy Unit, hosted by ML)" userId="8780178f-c962-4518-a070-fd8292572a75" providerId="ADAL" clId="{F7BFCCB5-6F60-4B4C-8F2B-82E3B95F8D19}" dt="2024-05-20T14:43:30.629" v="165" actId="700"/>
           <ac:spMkLst>
             <pc:docMk/>
             <pc:sldMk cId="3090482787" sldId="258"/>
             <ac:spMk id="5" creationId="{B85BD8CF-E5F7-63A5-7DBC-17CC923F156F}"/>
           </ac:spMkLst>
         </pc:spChg>
-        <pc:spChg chg="add mod ord">
-          <ac:chgData name="Andrew Hood (Strategy Unit, hosted by ML)" userId="8780178f-c962-4518-a070-fd8292572a75" providerId="ADAL" clId="{F7BFCCB5-6F60-4B4C-8F2B-82E3B95F8D19}" dt="2024-05-14T15:42:58.344" v="28" actId="700"/>
+        <pc:spChg chg="add del mod ord">
+          <ac:chgData name="Andrew Hood (Strategy Unit, hosted by ML)" userId="8780178f-c962-4518-a070-fd8292572a75" providerId="ADAL" clId="{F7BFCCB5-6F60-4B4C-8F2B-82E3B95F8D19}" dt="2024-05-20T14:43:30.629" v="165" actId="700"/>
           <ac:spMkLst>
             <pc:docMk/>
             <pc:sldMk cId="3090482787" sldId="258"/>
             <ac:spMk id="6" creationId="{401FFA3F-4820-F795-B5CA-04172E98B879}"/>
           </ac:spMkLst>
         </pc:spChg>
-        <pc:spChg chg="add mod ord">
-          <ac:chgData name="Andrew Hood (Strategy Unit, hosted by ML)" userId="8780178f-c962-4518-a070-fd8292572a75" providerId="ADAL" clId="{F7BFCCB5-6F60-4B4C-8F2B-82E3B95F8D19}" dt="2024-05-14T15:42:58.344" v="28" actId="700"/>
+        <pc:spChg chg="add del mod ord">
+          <ac:chgData name="Andrew Hood (Strategy Unit, hosted by ML)" userId="8780178f-c962-4518-a070-fd8292572a75" providerId="ADAL" clId="{F7BFCCB5-6F60-4B4C-8F2B-82E3B95F8D19}" dt="2024-05-20T14:43:30.629" v="165" actId="700"/>
           <ac:spMkLst>
             <pc:docMk/>
             <pc:sldMk cId="3090482787" sldId="258"/>
             <ac:spMk id="7" creationId="{69939C77-6A0B-EDC9-59AB-87DDB6523604}"/>
           </ac:spMkLst>
         </pc:spChg>
+        <pc:spChg chg="add mod ord">
+          <ac:chgData name="Andrew Hood (Strategy Unit, hosted by ML)" userId="8780178f-c962-4518-a070-fd8292572a75" providerId="ADAL" clId="{F7BFCCB5-6F60-4B4C-8F2B-82E3B95F8D19}" dt="2024-05-21T11:11:44.990" v="178" actId="27636"/>
+          <ac:spMkLst>
+            <pc:docMk/>
+            <pc:sldMk cId="3090482787" sldId="258"/>
+            <ac:spMk id="8" creationId="{64C1F094-A051-77FA-CCC4-5D3E375F84BB}"/>
+          </ac:spMkLst>
+        </pc:spChg>
+        <pc:spChg chg="add mod ord">
+          <ac:chgData name="Andrew Hood (Strategy Unit, hosted by ML)" userId="8780178f-c962-4518-a070-fd8292572a75" providerId="ADAL" clId="{F7BFCCB5-6F60-4B4C-8F2B-82E3B95F8D19}" dt="2024-05-20T14:44:25.680" v="172" actId="700"/>
+          <ac:spMkLst>
+            <pc:docMk/>
+            <pc:sldMk cId="3090482787" sldId="258"/>
+            <ac:spMk id="10" creationId="{8BC0BB63-DEBD-59CB-66A1-1075768896D1}"/>
+          </ac:spMkLst>
+        </pc:spChg>
+        <pc:picChg chg="add mod ord">
+          <ac:chgData name="Andrew Hood (Strategy Unit, hosted by ML)" userId="8780178f-c962-4518-a070-fd8292572a75" providerId="ADAL" clId="{F7BFCCB5-6F60-4B4C-8F2B-82E3B95F8D19}" dt="2024-05-20T14:44:25.680" v="172" actId="700"/>
+          <ac:picMkLst>
+            <pc:docMk/>
+            <pc:sldMk cId="3090482787" sldId="258"/>
+            <ac:picMk id="9" creationId="{2257B03A-6021-A2A2-DFBB-CCE58C6EB43E}"/>
+          </ac:picMkLst>
+        </pc:picChg>
       </pc:sldChg>
       <pc:sldChg chg="addSp delSp modSp mod modClrScheme chgLayout">
         <pc:chgData name="Andrew Hood (Strategy Unit, hosted by ML)" userId="8780178f-c962-4518-a070-fd8292572a75" providerId="ADAL" clId="{F7BFCCB5-6F60-4B4C-8F2B-82E3B95F8D19}" dt="2024-05-14T15:43:37.352" v="31" actId="700"/>
@@ -426,7 +474,7 @@
         </pc:spChg>
       </pc:sldChg>
       <pc:sldMasterChg chg="addSp delSp modSp mod delSldLayout modSldLayout sldLayoutOrd">
-        <pc:chgData name="Andrew Hood (Strategy Unit, hosted by ML)" userId="8780178f-c962-4518-a070-fd8292572a75" providerId="ADAL" clId="{F7BFCCB5-6F60-4B4C-8F2B-82E3B95F8D19}" dt="2024-05-20T10:26:12.880" v="158" actId="478"/>
+        <pc:chgData name="Andrew Hood (Strategy Unit, hosted by ML)" userId="8780178f-c962-4518-a070-fd8292572a75" providerId="ADAL" clId="{F7BFCCB5-6F60-4B4C-8F2B-82E3B95F8D19}" dt="2024-05-21T12:43:15.363" v="186" actId="242"/>
         <pc:sldMasterMkLst>
           <pc:docMk/>
           <pc:sldMasterMk cId="1350655971" sldId="2147483660"/>
@@ -464,14 +512,14 @@
           </ac:spMkLst>
         </pc:spChg>
         <pc:sldLayoutChg chg="modSp mod">
-          <pc:chgData name="Andrew Hood (Strategy Unit, hosted by ML)" userId="8780178f-c962-4518-a070-fd8292572a75" providerId="ADAL" clId="{F7BFCCB5-6F60-4B4C-8F2B-82E3B95F8D19}" dt="2024-05-20T10:10:25.926" v="112" actId="404"/>
+          <pc:chgData name="Andrew Hood (Strategy Unit, hosted by ML)" userId="8780178f-c962-4518-a070-fd8292572a75" providerId="ADAL" clId="{F7BFCCB5-6F60-4B4C-8F2B-82E3B95F8D19}" dt="2024-05-21T12:43:15.363" v="186" actId="242"/>
           <pc:sldLayoutMkLst>
             <pc:docMk/>
             <pc:sldMasterMk cId="1350655971" sldId="2147483660"/>
             <pc:sldLayoutMk cId="2708386492" sldId="2147483661"/>
           </pc:sldLayoutMkLst>
           <pc:spChg chg="mod">
-            <ac:chgData name="Andrew Hood (Strategy Unit, hosted by ML)" userId="8780178f-c962-4518-a070-fd8292572a75" providerId="ADAL" clId="{F7BFCCB5-6F60-4B4C-8F2B-82E3B95F8D19}" dt="2024-05-20T10:10:25.926" v="112" actId="404"/>
+            <ac:chgData name="Andrew Hood (Strategy Unit, hosted by ML)" userId="8780178f-c962-4518-a070-fd8292572a75" providerId="ADAL" clId="{F7BFCCB5-6F60-4B4C-8F2B-82E3B95F8D19}" dt="2024-05-21T11:11:02.077" v="173" actId="14100"/>
             <ac:spMkLst>
               <pc:docMk/>
               <pc:sldMasterMk cId="1350655971" sldId="2147483660"/>
@@ -480,7 +528,7 @@
             </ac:spMkLst>
           </pc:spChg>
           <pc:spChg chg="mod">
-            <ac:chgData name="Andrew Hood (Strategy Unit, hosted by ML)" userId="8780178f-c962-4518-a070-fd8292572a75" providerId="ADAL" clId="{F7BFCCB5-6F60-4B4C-8F2B-82E3B95F8D19}" dt="2024-05-14T16:10:28.016" v="83" actId="6549"/>
+            <ac:chgData name="Andrew Hood (Strategy Unit, hosted by ML)" userId="8780178f-c962-4518-a070-fd8292572a75" providerId="ADAL" clId="{F7BFCCB5-6F60-4B4C-8F2B-82E3B95F8D19}" dt="2024-05-21T12:43:15.363" v="186" actId="242"/>
             <ac:spMkLst>
               <pc:docMk/>
               <pc:sldMasterMk cId="1350655971" sldId="2147483660"/>
@@ -490,7 +538,7 @@
           </pc:spChg>
         </pc:sldLayoutChg>
         <pc:sldLayoutChg chg="addSp modSp mod">
-          <pc:chgData name="Andrew Hood (Strategy Unit, hosted by ML)" userId="8780178f-c962-4518-a070-fd8292572a75" providerId="ADAL" clId="{F7BFCCB5-6F60-4B4C-8F2B-82E3B95F8D19}" dt="2024-05-20T10:12:33.805" v="132" actId="14100"/>
+          <pc:chgData name="Andrew Hood (Strategy Unit, hosted by ML)" userId="8780178f-c962-4518-a070-fd8292572a75" providerId="ADAL" clId="{F7BFCCB5-6F60-4B4C-8F2B-82E3B95F8D19}" dt="2024-05-21T11:11:56.741" v="180" actId="255"/>
           <pc:sldLayoutMkLst>
             <pc:docMk/>
             <pc:sldMasterMk cId="1350655971" sldId="2147483660"/>
@@ -506,7 +554,7 @@
             </ac:spMkLst>
           </pc:spChg>
           <pc:spChg chg="mod">
-            <ac:chgData name="Andrew Hood (Strategy Unit, hosted by ML)" userId="8780178f-c962-4518-a070-fd8292572a75" providerId="ADAL" clId="{F7BFCCB5-6F60-4B4C-8F2B-82E3B95F8D19}" dt="2024-05-20T10:12:33.805" v="132" actId="14100"/>
+            <ac:chgData name="Andrew Hood (Strategy Unit, hosted by ML)" userId="8780178f-c962-4518-a070-fd8292572a75" providerId="ADAL" clId="{F7BFCCB5-6F60-4B4C-8F2B-82E3B95F8D19}" dt="2024-05-21T11:11:56.741" v="180" actId="255"/>
             <ac:spMkLst>
               <pc:docMk/>
               <pc:sldMasterMk cId="1350655971" sldId="2147483660"/>
@@ -630,7 +678,7 @@
           </pc:sldLayoutMkLst>
         </pc:sldLayoutChg>
         <pc:sldLayoutChg chg="addSp delSp modSp mod ord">
-          <pc:chgData name="Andrew Hood (Strategy Unit, hosted by ML)" userId="8780178f-c962-4518-a070-fd8292572a75" providerId="ADAL" clId="{F7BFCCB5-6F60-4B4C-8F2B-82E3B95F8D19}" dt="2024-05-20T10:25:16.535" v="143" actId="14100"/>
+          <pc:chgData name="Andrew Hood (Strategy Unit, hosted by ML)" userId="8780178f-c962-4518-a070-fd8292572a75" providerId="ADAL" clId="{F7BFCCB5-6F60-4B4C-8F2B-82E3B95F8D19}" dt="2024-05-21T11:14:16.074" v="184" actId="242"/>
           <pc:sldLayoutMkLst>
             <pc:docMk/>
             <pc:sldMasterMk cId="1350655971" sldId="2147483660"/>
@@ -646,7 +694,7 @@
             </ac:spMkLst>
           </pc:spChg>
           <pc:spChg chg="mod">
-            <ac:chgData name="Andrew Hood (Strategy Unit, hosted by ML)" userId="8780178f-c962-4518-a070-fd8292572a75" providerId="ADAL" clId="{F7BFCCB5-6F60-4B4C-8F2B-82E3B95F8D19}" dt="2024-05-20T10:09:26.390" v="105" actId="14100"/>
+            <ac:chgData name="Andrew Hood (Strategy Unit, hosted by ML)" userId="8780178f-c962-4518-a070-fd8292572a75" providerId="ADAL" clId="{F7BFCCB5-6F60-4B4C-8F2B-82E3B95F8D19}" dt="2024-05-21T11:14:16.074" v="184" actId="242"/>
             <ac:spMkLst>
               <pc:docMk/>
               <pc:sldMasterMk cId="1350655971" sldId="2147483660"/>
@@ -664,7 +712,7 @@
             </ac:spMkLst>
           </pc:spChg>
           <pc:spChg chg="add mod">
-            <ac:chgData name="Andrew Hood (Strategy Unit, hosted by ML)" userId="8780178f-c962-4518-a070-fd8292572a75" providerId="ADAL" clId="{F7BFCCB5-6F60-4B4C-8F2B-82E3B95F8D19}" dt="2024-05-20T10:25:16.535" v="143" actId="14100"/>
+            <ac:chgData name="Andrew Hood (Strategy Unit, hosted by ML)" userId="8780178f-c962-4518-a070-fd8292572a75" providerId="ADAL" clId="{F7BFCCB5-6F60-4B4C-8F2B-82E3B95F8D19}" dt="2024-05-21T11:14:11.251" v="183" actId="242"/>
             <ac:spMkLst>
               <pc:docMk/>
               <pc:sldMasterMk cId="1350655971" sldId="2147483660"/>
@@ -699,14 +747,14 @@
           </pc:sldLayoutMkLst>
         </pc:sldLayoutChg>
         <pc:sldLayoutChg chg="modSp mod ord">
-          <pc:chgData name="Andrew Hood (Strategy Unit, hosted by ML)" userId="8780178f-c962-4518-a070-fd8292572a75" providerId="ADAL" clId="{F7BFCCB5-6F60-4B4C-8F2B-82E3B95F8D19}" dt="2024-05-20T10:10:49.630" v="114" actId="404"/>
+          <pc:chgData name="Andrew Hood (Strategy Unit, hosted by ML)" userId="8780178f-c962-4518-a070-fd8292572a75" providerId="ADAL" clId="{F7BFCCB5-6F60-4B4C-8F2B-82E3B95F8D19}" dt="2024-05-21T12:43:05.925" v="185" actId="242"/>
           <pc:sldLayoutMkLst>
             <pc:docMk/>
             <pc:sldMasterMk cId="1350655971" sldId="2147483660"/>
             <pc:sldLayoutMk cId="2868002840" sldId="2147483672"/>
           </pc:sldLayoutMkLst>
           <pc:spChg chg="mod">
-            <ac:chgData name="Andrew Hood (Strategy Unit, hosted by ML)" userId="8780178f-c962-4518-a070-fd8292572a75" providerId="ADAL" clId="{F7BFCCB5-6F60-4B4C-8F2B-82E3B95F8D19}" dt="2024-05-20T10:10:49.630" v="114" actId="404"/>
+            <ac:chgData name="Andrew Hood (Strategy Unit, hosted by ML)" userId="8780178f-c962-4518-a070-fd8292572a75" providerId="ADAL" clId="{F7BFCCB5-6F60-4B4C-8F2B-82E3B95F8D19}" dt="2024-05-21T11:11:20.465" v="175" actId="14100"/>
             <ac:spMkLst>
               <pc:docMk/>
               <pc:sldMasterMk cId="1350655971" sldId="2147483660"/>
@@ -714,9 +762,18 @@
               <ac:spMk id="2" creationId="{00000000-0000-0000-0000-000000000000}"/>
             </ac:spMkLst>
           </pc:spChg>
+          <pc:spChg chg="mod">
+            <ac:chgData name="Andrew Hood (Strategy Unit, hosted by ML)" userId="8780178f-c962-4518-a070-fd8292572a75" providerId="ADAL" clId="{F7BFCCB5-6F60-4B4C-8F2B-82E3B95F8D19}" dt="2024-05-21T12:43:05.925" v="185" actId="242"/>
+            <ac:spMkLst>
+              <pc:docMk/>
+              <pc:sldMasterMk cId="1350655971" sldId="2147483660"/>
+              <pc:sldLayoutMk cId="2868002840" sldId="2147483672"/>
+              <ac:spMk id="3" creationId="{00000000-0000-0000-0000-000000000000}"/>
+            </ac:spMkLst>
+          </pc:spChg>
         </pc:sldLayoutChg>
         <pc:sldLayoutChg chg="addSp delSp modSp mod ord">
-          <pc:chgData name="Andrew Hood (Strategy Unit, hosted by ML)" userId="8780178f-c962-4518-a070-fd8292572a75" providerId="ADAL" clId="{F7BFCCB5-6F60-4B4C-8F2B-82E3B95F8D19}" dt="2024-05-20T10:13:11.815" v="134" actId="11529"/>
+          <pc:chgData name="Andrew Hood (Strategy Unit, hosted by ML)" userId="8780178f-c962-4518-a070-fd8292572a75" providerId="ADAL" clId="{F7BFCCB5-6F60-4B4C-8F2B-82E3B95F8D19}" dt="2024-05-21T11:13:54.647" v="182" actId="242"/>
           <pc:sldLayoutMkLst>
             <pc:docMk/>
             <pc:sldMasterMk cId="1350655971" sldId="2147483660"/>
@@ -731,8 +788,8 @@
               <ac:spMk id="2" creationId="{00000000-0000-0000-0000-000000000000}"/>
             </ac:spMkLst>
           </pc:spChg>
-          <pc:spChg chg="mod">
-            <ac:chgData name="Andrew Hood (Strategy Unit, hosted by ML)" userId="8780178f-c962-4518-a070-fd8292572a75" providerId="ADAL" clId="{F7BFCCB5-6F60-4B4C-8F2B-82E3B95F8D19}" dt="2024-05-20T10:11:59.853" v="124" actId="14100"/>
+          <pc:spChg chg="del mod">
+            <ac:chgData name="Andrew Hood (Strategy Unit, hosted by ML)" userId="8780178f-c962-4518-a070-fd8292572a75" providerId="ADAL" clId="{F7BFCCB5-6F60-4B4C-8F2B-82E3B95F8D19}" dt="2024-05-20T14:41:18.833" v="162" actId="478"/>
             <ac:spMkLst>
               <pc:docMk/>
               <pc:sldMasterMk cId="1350655971" sldId="2147483660"/>
@@ -750,6 +807,15 @@
             </ac:spMkLst>
           </pc:spChg>
           <pc:spChg chg="add del">
+            <ac:chgData name="Andrew Hood (Strategy Unit, hosted by ML)" userId="8780178f-c962-4518-a070-fd8292572a75" providerId="ADAL" clId="{F7BFCCB5-6F60-4B4C-8F2B-82E3B95F8D19}" dt="2024-05-20T14:41:39.293" v="163" actId="11529"/>
+            <ac:spMkLst>
+              <pc:docMk/>
+              <pc:sldMasterMk cId="1350655971" sldId="2147483660"/>
+              <pc:sldLayoutMk cId="2240479861" sldId="2147483673"/>
+              <ac:spMk id="4" creationId="{ADCBE013-FDA8-8DB0-4DAE-2D9C86DE1843}"/>
+            </ac:spMkLst>
+          </pc:spChg>
+          <pc:spChg chg="add del">
             <ac:chgData name="Andrew Hood (Strategy Unit, hosted by ML)" userId="8780178f-c962-4518-a070-fd8292572a75" providerId="ADAL" clId="{F7BFCCB5-6F60-4B4C-8F2B-82E3B95F8D19}" dt="2024-05-20T10:13:11.815" v="134" actId="11529"/>
             <ac:spMkLst>
               <pc:docMk/>
@@ -759,7 +825,16 @@
             </ac:spMkLst>
           </pc:spChg>
           <pc:spChg chg="add mod">
-            <ac:chgData name="Andrew Hood (Strategy Unit, hosted by ML)" userId="8780178f-c962-4518-a070-fd8292572a75" providerId="ADAL" clId="{F7BFCCB5-6F60-4B4C-8F2B-82E3B95F8D19}" dt="2024-05-20T10:13:11.815" v="134" actId="11529"/>
+            <ac:chgData name="Andrew Hood (Strategy Unit, hosted by ML)" userId="8780178f-c962-4518-a070-fd8292572a75" providerId="ADAL" clId="{F7BFCCB5-6F60-4B4C-8F2B-82E3B95F8D19}" dt="2024-05-21T11:13:46.972" v="181" actId="242"/>
+            <ac:spMkLst>
+              <pc:docMk/>
+              <pc:sldMasterMk cId="1350655971" sldId="2147483660"/>
+              <pc:sldLayoutMk cId="2240479861" sldId="2147483673"/>
+              <ac:spMk id="7" creationId="{DE622849-4EA7-24AE-DD96-E693EAA81594}"/>
+            </ac:spMkLst>
+          </pc:spChg>
+          <pc:spChg chg="add mod">
+            <ac:chgData name="Andrew Hood (Strategy Unit, hosted by ML)" userId="8780178f-c962-4518-a070-fd8292572a75" providerId="ADAL" clId="{F7BFCCB5-6F60-4B4C-8F2B-82E3B95F8D19}" dt="2024-05-21T11:13:54.647" v="182" actId="242"/>
             <ac:spMkLst>
               <pc:docMk/>
               <pc:sldMasterMk cId="1350655971" sldId="2147483660"/>
@@ -959,7 +1034,7 @@
           <a:p>
             <a:fld id="{8490CA9A-2E33-CF44-8384-C36560AEBD58}" type="datetimeFigureOut">
               <a:rPr lang="en-US" smtClean="0"/>
-              <a:t>5/20/2024</a:t>
+              <a:t>5/21/2024</a:t>
             </a:fld>
             <a:endParaRPr lang="en-US"/>
           </a:p>
@@ -1885,8 +1960,8 @@
         </p:nvSpPr>
         <p:spPr>
           <a:xfrm>
-            <a:off x="457198" y="4755350"/>
-            <a:ext cx="8406375" cy="1218369"/>
+            <a:off x="457198" y="4624736"/>
+            <a:ext cx="8406375" cy="1348983"/>
           </a:xfrm>
         </p:spPr>
         <p:txBody>
@@ -2177,8 +2252,8 @@
         </p:nvSpPr>
         <p:spPr>
           <a:xfrm>
-            <a:off x="457199" y="4755350"/>
-            <a:ext cx="7772400" cy="1218369"/>
+            <a:off x="457199" y="4665306"/>
+            <a:ext cx="7772400" cy="1308413"/>
           </a:xfrm>
         </p:spPr>
         <p:txBody>
@@ -2798,7 +2873,7 @@
           </a:prstGeom>
         </p:spPr>
         <p:txBody>
-          <a:bodyPr>
+          <a:bodyPr anchor="ctr">
             <a:normAutofit/>
           </a:bodyPr>
           <a:lstStyle>
@@ -3073,7 +3148,7 @@
           </a:prstGeom>
         </p:spPr>
         <p:txBody>
-          <a:bodyPr>
+          <a:bodyPr anchor="ctr">
             <a:normAutofit/>
           </a:bodyPr>
           <a:lstStyle>
@@ -3202,43 +3277,6 @@
             <a:r>
               <a:rPr lang="en-GB" dirty="0"/>
               <a:t>Click to edit title</a:t>
-            </a:r>
-            <a:endParaRPr lang="en-US" dirty="0"/>
-          </a:p>
-        </p:txBody>
-      </p:sp>
-      <p:sp>
-        <p:nvSpPr>
-          <p:cNvPr id="3" name="Content Placeholder 2"/>
-          <p:cNvSpPr>
-            <a:spLocks noGrp="1"/>
-          </p:cNvSpPr>
-          <p:nvPr>
-            <p:ph idx="1" hasCustomPrompt="1"/>
-          </p:nvPr>
-        </p:nvSpPr>
-        <p:spPr>
-          <a:xfrm>
-            <a:off x="909829" y="1550608"/>
-            <a:ext cx="10243946" cy="460417"/>
-          </a:xfrm>
-          <a:prstGeom prst="rect">
-            <a:avLst/>
-          </a:prstGeom>
-        </p:spPr>
-        <p:txBody>
-          <a:bodyPr anchor="ctr"/>
-          <a:lstStyle>
-            <a:lvl1pPr marL="0" indent="0">
-              <a:buNone/>
-              <a:defRPr/>
-            </a:lvl1pPr>
-          </a:lstStyle>
-          <a:p>
-            <a:pPr lvl="0"/>
-            <a:r>
-              <a:rPr lang="en-GB" dirty="0"/>
-              <a:t>Click to edit text</a:t>
             </a:r>
             <a:endParaRPr lang="en-US" dirty="0"/>
           </a:p>
@@ -3422,16 +3460,115 @@
         </p:nvSpPr>
         <p:spPr>
           <a:xfrm>
-            <a:off x="909638" y="2228850"/>
-            <a:ext cx="7015162" cy="3695700"/>
+            <a:off x="4138613" y="1550608"/>
+            <a:ext cx="7015162" cy="4263106"/>
           </a:xfrm>
           <a:prstGeom prst="rect">
             <a:avLst/>
           </a:prstGeom>
         </p:spPr>
         <p:txBody>
-          <a:bodyPr/>
-          <a:lstStyle/>
+          <a:bodyPr anchor="ctr">
+            <a:normAutofit/>
+          </a:bodyPr>
+          <a:lstStyle>
+            <a:lvl1pPr>
+              <a:defRPr sz="1800"/>
+            </a:lvl1pPr>
+            <a:lvl2pPr>
+              <a:defRPr sz="1800"/>
+            </a:lvl2pPr>
+            <a:lvl3pPr>
+              <a:defRPr sz="1800"/>
+            </a:lvl3pPr>
+            <a:lvl4pPr>
+              <a:defRPr sz="1800"/>
+            </a:lvl4pPr>
+            <a:lvl5pPr>
+              <a:defRPr sz="1800"/>
+            </a:lvl5pPr>
+          </a:lstStyle>
+          <a:p>
+            <a:pPr lvl="0"/>
+            <a:r>
+              <a:rPr lang="en-US"/>
+              <a:t>Click to edit Master text styles</a:t>
+            </a:r>
+          </a:p>
+          <a:p>
+            <a:pPr lvl="1"/>
+            <a:r>
+              <a:rPr lang="en-US"/>
+              <a:t>Second level</a:t>
+            </a:r>
+          </a:p>
+          <a:p>
+            <a:pPr lvl="2"/>
+            <a:r>
+              <a:rPr lang="en-US"/>
+              <a:t>Third level</a:t>
+            </a:r>
+          </a:p>
+          <a:p>
+            <a:pPr lvl="3"/>
+            <a:r>
+              <a:rPr lang="en-US"/>
+              <a:t>Fourth level</a:t>
+            </a:r>
+          </a:p>
+          <a:p>
+            <a:pPr lvl="4"/>
+            <a:r>
+              <a:rPr lang="en-US"/>
+              <a:t>Fifth level</a:t>
+            </a:r>
+            <a:endParaRPr lang="en-GB"/>
+          </a:p>
+        </p:txBody>
+      </p:sp>
+      <p:sp>
+        <p:nvSpPr>
+          <p:cNvPr id="7" name="Text Placeholder 6">
+            <a:extLst>
+              <a:ext uri="{FF2B5EF4-FFF2-40B4-BE49-F238E27FC236}">
+                <a16:creationId xmlns:a16="http://schemas.microsoft.com/office/drawing/2014/main" id="{DE622849-4EA7-24AE-DD96-E693EAA81594}"/>
+              </a:ext>
+            </a:extLst>
+          </p:cNvPr>
+          <p:cNvSpPr>
+            <a:spLocks noGrp="1"/>
+          </p:cNvSpPr>
+          <p:nvPr>
+            <p:ph type="body" sz="quarter" idx="13"/>
+          </p:nvPr>
+        </p:nvSpPr>
+        <p:spPr>
+          <a:xfrm>
+            <a:off x="909638" y="1550988"/>
+            <a:ext cx="2997200" cy="4262437"/>
+          </a:xfrm>
+        </p:spPr>
+        <p:txBody>
+          <a:bodyPr anchor="ctr">
+            <a:normAutofit/>
+          </a:bodyPr>
+          <a:lstStyle>
+            <a:lvl1pPr>
+              <a:defRPr sz="1800"/>
+            </a:lvl1pPr>
+            <a:lvl2pPr>
+              <a:defRPr sz="1800"/>
+            </a:lvl2pPr>
+            <a:lvl3pPr>
+              <a:defRPr sz="1800"/>
+            </a:lvl3pPr>
+            <a:lvl4pPr>
+              <a:defRPr sz="1800"/>
+            </a:lvl4pPr>
+            <a:lvl5pPr>
+              <a:defRPr sz="1800"/>
+            </a:lvl5pPr>
+          </a:lstStyle>
           <a:p>
             <a:pPr lvl="0"/>
             <a:r>
@@ -3523,7 +3660,7 @@
           <a:p>
             <a:fld id="{0EB35C0E-E263-0848-A698-EE526CA39358}" type="datetimeFigureOut">
               <a:rPr lang="en-US" smtClean="0"/>
-              <a:t>5/20/2024</a:t>
+              <a:t>5/21/2024</a:t>
             </a:fld>
             <a:endParaRPr lang="en-US" dirty="0"/>
           </a:p>
@@ -3667,8 +3804,26 @@
           </a:prstGeom>
         </p:spPr>
         <p:txBody>
-          <a:bodyPr/>
-          <a:lstStyle/>
+          <a:bodyPr>
+            <a:normAutofit/>
+          </a:bodyPr>
+          <a:lstStyle>
+            <a:lvl1pPr>
+              <a:defRPr sz="1800"/>
+            </a:lvl1pPr>
+            <a:lvl2pPr>
+              <a:defRPr sz="1800"/>
+            </a:lvl2pPr>
+            <a:lvl3pPr>
+              <a:defRPr sz="1800"/>
+            </a:lvl3pPr>
+            <a:lvl4pPr>
+              <a:defRPr sz="1800"/>
+            </a:lvl4pPr>
+            <a:lvl5pPr>
+              <a:defRPr sz="1800"/>
+            </a:lvl5pPr>
+          </a:lstStyle>
           <a:p>
             <a:pPr lvl="0"/>
             <a:r>
@@ -9407,10 +9562,10 @@
       </p:grpSpPr>
       <p:sp>
         <p:nvSpPr>
-          <p:cNvPr id="5" name="Title 4">
+          <p:cNvPr id="10" name="Title 9">
             <a:extLst>
               <a:ext uri="{FF2B5EF4-FFF2-40B4-BE49-F238E27FC236}">
-                <a16:creationId xmlns:a16="http://schemas.microsoft.com/office/drawing/2014/main" id="{B85BD8CF-E5F7-63A5-7DBC-17CC923F156F}"/>
+                <a16:creationId xmlns:a16="http://schemas.microsoft.com/office/drawing/2014/main" id="{8BC0BB63-DEBD-59CB-66A1-1075768896D1}"/>
               </a:ext>
             </a:extLst>
           </p:cNvPr>
@@ -9430,12 +9585,44 @@
           </a:p>
         </p:txBody>
       </p:sp>
+      <p:pic>
+        <p:nvPicPr>
+          <p:cNvPr id="9" name="Content Placeholder 8">
+            <a:extLst>
+              <a:ext uri="{FF2B5EF4-FFF2-40B4-BE49-F238E27FC236}">
+                <a16:creationId xmlns:a16="http://schemas.microsoft.com/office/drawing/2014/main" id="{2257B03A-6021-A2A2-DFBB-CCE58C6EB43E}"/>
+              </a:ext>
+            </a:extLst>
+          </p:cNvPr>
+          <p:cNvPicPr>
+            <a:picLocks noGrp="1" noChangeAspect="1"/>
+          </p:cNvPicPr>
+          <p:nvPr>
+            <p:ph sz="quarter" idx="12"/>
+          </p:nvPr>
+        </p:nvPicPr>
+        <p:blipFill>
+          <a:blip r:embed="rId2"/>
+          <a:stretch>
+            <a:fillRect/>
+          </a:stretch>
+        </p:blipFill>
+        <p:spPr>
+          <a:xfrm>
+            <a:off x="5606905" y="1572807"/>
+            <a:ext cx="4078577" cy="4218798"/>
+          </a:xfrm>
+          <a:prstGeom prst="rect">
+            <a:avLst/>
+          </a:prstGeom>
+        </p:spPr>
+      </p:pic>
       <p:sp>
         <p:nvSpPr>
-          <p:cNvPr id="6" name="Content Placeholder 5">
+          <p:cNvPr id="8" name="Text Placeholder 7">
             <a:extLst>
               <a:ext uri="{FF2B5EF4-FFF2-40B4-BE49-F238E27FC236}">
-                <a16:creationId xmlns:a16="http://schemas.microsoft.com/office/drawing/2014/main" id="{401FFA3F-4820-F795-B5CA-04172E98B879}"/>
+                <a16:creationId xmlns:a16="http://schemas.microsoft.com/office/drawing/2014/main" id="{64C1F094-A051-77FA-CCC4-5D3E375F84BB}"/>
               </a:ext>
             </a:extLst>
           </p:cNvPr>
@@ -9443,56 +9630,50 @@
             <a:spLocks noGrp="1"/>
           </p:cNvSpPr>
           <p:nvPr>
-            <p:ph sz="half" idx="4294967295"/>
+            <p:ph type="body" sz="quarter" idx="13"/>
           </p:nvPr>
         </p:nvSpPr>
-        <p:spPr>
-          <a:xfrm>
-            <a:off x="1024127" y="1998070"/>
-            <a:ext cx="4754880" cy="3871102"/>
-          </a:xfrm>
-          <a:prstGeom prst="rect">
-            <a:avLst/>
-          </a:prstGeom>
-        </p:spPr>
+        <p:spPr/>
         <p:txBody>
-          <a:bodyPr/>
+          <a:bodyPr>
+            <a:normAutofit/>
+          </a:bodyPr>
           <a:lstStyle/>
           <a:p>
-            <a:endParaRPr lang="en-GB"/>
-          </a:p>
-        </p:txBody>
-      </p:sp>
-      <p:sp>
-        <p:nvSpPr>
-          <p:cNvPr id="7" name="Content Placeholder 6">
-            <a:extLst>
-              <a:ext uri="{FF2B5EF4-FFF2-40B4-BE49-F238E27FC236}">
-                <a16:creationId xmlns:a16="http://schemas.microsoft.com/office/drawing/2014/main" id="{69939C77-6A0B-EDC9-59AB-87DDB6523604}"/>
-              </a:ext>
-            </a:extLst>
-          </p:cNvPr>
-          <p:cNvSpPr>
-            <a:spLocks noGrp="1"/>
-          </p:cNvSpPr>
-          <p:nvPr>
-            <p:ph sz="half" idx="4294967295"/>
-          </p:nvPr>
-        </p:nvSpPr>
-        <p:spPr>
-          <a:xfrm>
-            <a:off x="5989319" y="1998070"/>
-            <a:ext cx="4754880" cy="3871102"/>
-          </a:xfrm>
-          <a:prstGeom prst="rect">
-            <a:avLst/>
-          </a:prstGeom>
-        </p:spPr>
-        <p:txBody>
-          <a:bodyPr/>
-          <a:lstStyle/>
-          <a:p>
-            <a:endParaRPr lang="en-GB"/>
+            <a:r>
+              <a:rPr lang="en-GB" dirty="0"/>
+              <a:t> Insert bullet points here</a:t>
+            </a:r>
+          </a:p>
+          <a:p>
+            <a:endParaRPr lang="en-GB" dirty="0"/>
+          </a:p>
+          <a:p>
+            <a:r>
+              <a:rPr lang="en-GB" dirty="0"/>
+              <a:t> Insert bullet points here</a:t>
+            </a:r>
+          </a:p>
+          <a:p>
+            <a:endParaRPr lang="en-GB" dirty="0"/>
+          </a:p>
+          <a:p>
+            <a:r>
+              <a:rPr lang="en-GB" dirty="0"/>
+              <a:t> Insert bullet points here</a:t>
+            </a:r>
+          </a:p>
+          <a:p>
+            <a:endParaRPr lang="en-GB" dirty="0"/>
+          </a:p>
+          <a:p>
+            <a:r>
+              <a:rPr lang="en-GB" dirty="0"/>
+              <a:t> Insert bullet points here </a:t>
+            </a:r>
+          </a:p>
+          <a:p>
+            <a:endParaRPr lang="en-GB" dirty="0"/>
           </a:p>
         </p:txBody>
       </p:sp>
